--- a/docs/architecture.pptx
+++ b/docs/architecture.pptx
@@ -4347,7 +4347,7 @@
                 <a:latin typeface="Noto Sans JP"/>
                 <a:ea typeface="Noto Sans JP"/>
               </a:rPr>
-              <a:t>機器の一覧とケーブルの正（NAUTOBOT=1）</a:t>
+              <a:t>機器の一覧とケーブルの正（いつも立つ）</a:t>
             </a:r>
           </a:p>
           <a:p>
@@ -4934,7 +4934,7 @@
                 <a:latin typeface="Noto Sans JP"/>
                 <a:ea typeface="Noto Sans JP"/>
               </a:rPr>
-              <a:t>・作るのは ops/up.sh、消すのは ops/down.sh。何を作るかは deploy.env（AGENT / PIPELINE / WORKFLOW / NAUTOBOT など）。</a:t>
+              <a:t>・作るのは ops/up.sh、消すのは ops/down.sh。何を作るかは deploy.env（AGENT / PIPELINE / WORKFLOW など）。Nautobot は PIPELINE=1 ならいつも立つ。</a:t>
             </a:r>
           </a:p>
         </p:txBody>
@@ -6547,7 +6547,7 @@
                 <a:latin typeface="Noto Sans JP"/>
                 <a:ea typeface="Noto Sans JP"/>
               </a:rPr>
-              <a:t>・dialin が取りにいく機器の一覧は SSM のパラメータ。NAUTOBOT=1 のときは Nautobot の Job が書き換える（4 枚目）。</a:t>
+              <a:t>・dialin が取りにいく機器の一覧は SSM のパラメータ。Nautobot の Job が書き換える（4 枚目）。</a:t>
             </a:r>
           </a:p>
           <a:p>
@@ -8489,7 +8489,7 @@
                 <a:latin typeface="Noto Sans JP"/>
                 <a:ea typeface="Noto Sans JP"/>
               </a:rPr>
-              <a:t>Nautobot 連携（NAUTOBOT=1）</a:t>
+              <a:t>Nautobot 連携（いつも立つ）</a:t>
             </a:r>
           </a:p>
         </p:txBody>
@@ -10082,7 +10082,7 @@
                 <a:latin typeface="Noto Sans JP"/>
                 <a:ea typeface="Noto Sans JP"/>
               </a:rPr>
-              <a:t>・NAUTOBOT=1 の間は、Web の画面からトポロジを編集できない（正は Nautobot）。</a:t>
+              <a:t>・Web の画面からはトポロジを編集できない（正は Nautobot）。</a:t>
             </a:r>
           </a:p>
           <a:p>

--- a/docs/architecture.pptx
+++ b/docs/architecture.pptx
@@ -10082,7 +10082,7 @@
                 <a:latin typeface="Noto Sans JP"/>
                 <a:ea typeface="Noto Sans JP"/>
               </a:rPr>
-              <a:t>・Web の画面からはトポロジを編集できない（正は Nautobot）。</a:t>
+              <a:t>・Web の画面のリンクの追加・削除は Nautobot に書く（Job が Neptune に反映）。</a:t>
             </a:r>
           </a:p>
           <a:p>

--- a/docs/architecture.pptx
+++ b/docs/architecture.pptx
@@ -3748,6 +3748,19 @@
               <a:t>Prometheus・Splunk へ</a:t>
             </a:r>
           </a:p>
+          <a:p>
+            <a:pPr algn="l"/>
+            <a:r>
+              <a:rPr sz="1000" b="0">
+                <a:solidFill>
+                  <a:srgbClr val="5A6775"/>
+                </a:solidFill>
+                <a:latin typeface="Noto Sans JP"/>
+                <a:ea typeface="Noto Sans JP"/>
+              </a:rPr>
+              <a:t>（書き先は STORES で選ぶ）</a:t>
+            </a:r>
+          </a:p>
         </p:txBody>
       </p:sp>
       <p:cxnSp>
@@ -3937,7 +3950,7 @@
                 <a:latin typeface="Noto Sans JP"/>
                 <a:ea typeface="Noto Sans JP"/>
               </a:rPr>
-              <a:t>アラートを SNS の</a:t>
+              <a:t>同じ 4 種類のアラートを</a:t>
             </a:r>
           </a:p>
           <a:p>
@@ -3950,7 +3963,7 @@
                 <a:latin typeface="Noto Sans JP"/>
                 <a:ea typeface="Noto Sans JP"/>
               </a:rPr>
-              <a:t>トピックへ出す</a:t>
+              <a:t>両方が SNS のトピックへ出す</a:t>
             </a:r>
           </a:p>
         </p:txBody>
@@ -4241,7 +4254,7 @@
         <p:spPr>
           <a:xfrm>
             <a:off x="457200" y="4251960"/>
-            <a:ext cx="3154680" cy="1600200"/>
+            <a:ext cx="2450592" cy="1600200"/>
           </a:xfrm>
           <a:prstGeom prst="roundRect">
             <a:avLst>
@@ -4289,7 +4302,7 @@
         <p:spPr>
           <a:xfrm>
             <a:off x="594360" y="4343400"/>
-            <a:ext cx="2880360" cy="320040"/>
+            <a:ext cx="2176272" cy="320040"/>
           </a:xfrm>
           <a:prstGeom prst="rect">
             <a:avLst/>
@@ -4325,7 +4338,7 @@
         <p:spPr>
           <a:xfrm>
             <a:off x="594360" y="4754880"/>
-            <a:ext cx="2880360" cy="1005840"/>
+            <a:ext cx="2176272" cy="1005840"/>
           </a:xfrm>
           <a:prstGeom prst="rect">
             <a:avLst/>
@@ -4340,20 +4353,20 @@
           <a:p>
             <a:pPr algn="l"/>
             <a:r>
-              <a:rPr sz="1000" b="0">
+              <a:rPr sz="950" b="0">
                 <a:solidFill>
                   <a:srgbClr val="5A6775"/>
                 </a:solidFill>
                 <a:latin typeface="Noto Sans JP"/>
                 <a:ea typeface="Noto Sans JP"/>
               </a:rPr>
-              <a:t>機器の一覧とケーブルの正（いつも立つ）</a:t>
+              <a:t>機器の一覧とケーブルの正</a:t>
             </a:r>
           </a:p>
           <a:p>
             <a:pPr algn="l"/>
             <a:r>
-              <a:rPr sz="1000" b="0">
+              <a:rPr sz="950" b="0">
                 <a:solidFill>
                   <a:srgbClr val="5A6775"/>
                 </a:solidFill>
@@ -4366,7 +4379,7 @@
           <a:p>
             <a:pPr algn="l"/>
             <a:r>
-              <a:rPr sz="1000" b="0">
+              <a:rPr sz="950" b="0">
                 <a:solidFill>
                   <a:srgbClr val="5A6775"/>
                 </a:solidFill>
@@ -4386,8 +4399,8 @@
         </p:nvSpPr>
         <p:spPr>
           <a:xfrm>
-            <a:off x="3977639" y="4251960"/>
-            <a:ext cx="3154680" cy="1600200"/>
+            <a:off x="3273552" y="4251960"/>
+            <a:ext cx="2450592" cy="1600200"/>
           </a:xfrm>
           <a:prstGeom prst="roundRect">
             <a:avLst>
@@ -4434,8 +4447,8 @@
         </p:nvSpPr>
         <p:spPr>
           <a:xfrm>
-            <a:off x="4114800" y="4343400"/>
-            <a:ext cx="2880360" cy="320040"/>
+            <a:off x="3410712" y="4343400"/>
+            <a:ext cx="2176272" cy="320040"/>
           </a:xfrm>
           <a:prstGeom prst="rect">
             <a:avLst/>
@@ -4450,14 +4463,14 @@
           <a:p>
             <a:pPr algn="l"/>
             <a:r>
-              <a:rPr sz="1200" b="1">
+              <a:rPr sz="1100" b="1">
                 <a:solidFill>
                   <a:srgbClr val="232F3E"/>
                 </a:solidFill>
                 <a:latin typeface="Noto Sans JP"/>
                 <a:ea typeface="Noto Sans JP"/>
               </a:rPr>
-              <a:t>Amazon Neptune</a:t>
+              <a:t>Amazon Neptune Analytics</a:t>
             </a:r>
           </a:p>
         </p:txBody>
@@ -4470,8 +4483,8 @@
         </p:nvSpPr>
         <p:spPr>
           <a:xfrm>
-            <a:off x="4114800" y="4754880"/>
-            <a:ext cx="2880360" cy="1005840"/>
+            <a:off x="3410712" y="4754880"/>
+            <a:ext cx="2176272" cy="1005840"/>
           </a:xfrm>
           <a:prstGeom prst="rect">
             <a:avLst/>
@@ -4486,7 +4499,7 @@
           <a:p>
             <a:pPr algn="l"/>
             <a:r>
-              <a:rPr sz="1000" b="0">
+              <a:rPr sz="950" b="0">
                 <a:solidFill>
                   <a:srgbClr val="5A6775"/>
                 </a:solidFill>
@@ -4499,7 +4512,7 @@
           <a:p>
             <a:pPr algn="l"/>
             <a:r>
-              <a:rPr sz="1000" b="0">
+              <a:rPr sz="950" b="0">
                 <a:solidFill>
                   <a:srgbClr val="5A6775"/>
                 </a:solidFill>
@@ -4512,14 +4525,14 @@
           <a:p>
             <a:pPr algn="l"/>
             <a:r>
-              <a:rPr sz="1000" b="0">
+              <a:rPr sz="950" b="0">
                 <a:solidFill>
                   <a:srgbClr val="5A6775"/>
                 </a:solidFill>
                 <a:latin typeface="Noto Sans JP"/>
                 <a:ea typeface="Noto Sans JP"/>
               </a:rPr>
-              <a:t>修復案もここに置く</a:t>
+              <a:t>修復案と履歴は置かない</a:t>
             </a:r>
           </a:p>
         </p:txBody>
@@ -4532,8 +4545,8 @@
         </p:nvSpPr>
         <p:spPr>
           <a:xfrm>
-            <a:off x="7498079" y="4251960"/>
-            <a:ext cx="3154680" cy="1600200"/>
+            <a:off x="8906256" y="4251960"/>
+            <a:ext cx="2450592" cy="1600200"/>
           </a:xfrm>
           <a:prstGeom prst="roundRect">
             <a:avLst>
@@ -4580,8 +4593,8 @@
         </p:nvSpPr>
         <p:spPr>
           <a:xfrm>
-            <a:off x="7635240" y="4343400"/>
-            <a:ext cx="2880360" cy="320040"/>
+            <a:off x="9043416" y="4343400"/>
+            <a:ext cx="2176272" cy="320040"/>
           </a:xfrm>
           <a:prstGeom prst="rect">
             <a:avLst/>
@@ -4616,8 +4629,8 @@
         </p:nvSpPr>
         <p:spPr>
           <a:xfrm>
-            <a:off x="7635240" y="4754880"/>
-            <a:ext cx="2880360" cy="1005840"/>
+            <a:off x="9043416" y="4754880"/>
+            <a:ext cx="2176272" cy="1005840"/>
           </a:xfrm>
           <a:prstGeom prst="rect">
             <a:avLst/>
@@ -4632,7 +4645,7 @@
           <a:p>
             <a:pPr algn="l"/>
             <a:r>
-              <a:rPr sz="1000" b="0">
+              <a:rPr sz="950" b="0">
                 <a:solidFill>
                   <a:srgbClr val="5A6775"/>
                 </a:solidFill>
@@ -4645,7 +4658,7 @@
           <a:p>
             <a:pPr algn="l"/>
             <a:r>
-              <a:rPr sz="1000" b="0">
+              <a:rPr sz="950" b="0">
                 <a:solidFill>
                   <a:srgbClr val="5A6775"/>
                 </a:solidFill>
@@ -4658,7 +4671,7 @@
           <a:p>
             <a:pPr algn="l"/>
             <a:r>
-              <a:rPr sz="1000" b="0">
+              <a:rPr sz="950" b="0">
                 <a:solidFill>
                   <a:srgbClr val="5A6775"/>
                 </a:solidFill>
@@ -4678,8 +4691,8 @@
         </p:nvSpPr>
         <p:spPr>
           <a:xfrm>
-            <a:off x="11018520" y="4251960"/>
-            <a:ext cx="3154680" cy="1600200"/>
+            <a:off x="11722608" y="4251960"/>
+            <a:ext cx="2450592" cy="1600200"/>
           </a:xfrm>
           <a:prstGeom prst="roundRect">
             <a:avLst>
@@ -4726,8 +4739,8 @@
         </p:nvSpPr>
         <p:spPr>
           <a:xfrm>
-            <a:off x="11155680" y="4343400"/>
-            <a:ext cx="2880360" cy="320040"/>
+            <a:off x="11859768" y="4343400"/>
+            <a:ext cx="2176272" cy="320040"/>
           </a:xfrm>
           <a:prstGeom prst="rect">
             <a:avLst/>
@@ -4762,8 +4775,8 @@
         </p:nvSpPr>
         <p:spPr>
           <a:xfrm>
-            <a:off x="11155680" y="4754880"/>
-            <a:ext cx="2880360" cy="1005840"/>
+            <a:off x="11859768" y="4754880"/>
+            <a:ext cx="2176272" cy="1005840"/>
           </a:xfrm>
           <a:prstGeom prst="rect">
             <a:avLst/>
@@ -4778,7 +4791,7 @@
           <a:p>
             <a:pPr algn="l"/>
             <a:r>
-              <a:rPr sz="1000" b="0">
+              <a:rPr sz="950" b="0">
                 <a:solidFill>
                   <a:srgbClr val="5A6775"/>
                 </a:solidFill>
@@ -4791,7 +4804,7 @@
           <a:p>
             <a:pPr algn="l"/>
             <a:r>
-              <a:rPr sz="1000" b="0">
+              <a:rPr sz="950" b="0">
                 <a:solidFill>
                   <a:srgbClr val="5A6775"/>
                 </a:solidFill>
@@ -4804,7 +4817,7 @@
           <a:p>
             <a:pPr algn="l"/>
             <a:r>
-              <a:rPr sz="1000" b="0">
+              <a:rPr sz="950" b="0">
                 <a:solidFill>
                   <a:srgbClr val="5A6775"/>
                 </a:solidFill>
@@ -4824,8 +4837,8 @@
         </p:nvSpPr>
         <p:spPr>
           <a:xfrm>
-            <a:off x="457200" y="6263640"/>
-            <a:ext cx="13716000" cy="1417320"/>
+            <a:off x="457200" y="6172200"/>
+            <a:ext cx="13716000" cy="1554480"/>
           </a:xfrm>
           <a:prstGeom prst="roundRect">
             <a:avLst>
@@ -4872,7 +4885,7 @@
         </p:nvSpPr>
         <p:spPr>
           <a:xfrm>
-            <a:off x="594360" y="6336792"/>
+            <a:off x="594360" y="6236208"/>
             <a:ext cx="13441680" cy="1271016"/>
           </a:xfrm>
           <a:prstGeom prst="rect">
@@ -4921,7 +4934,7 @@
                 <a:latin typeface="Noto Sans JP"/>
                 <a:ea typeface="Noto Sans JP"/>
               </a:rPr>
-              <a:t>・画面（Web・Grafana・Splunk・Temporal・Nautobot）は、Web の EC2 を踏み台にした SSM のポートフォワーディングで PC の localhost に開く。</a:t>
+              <a:t>・画面（Web・Grafana・Splunk・Temporal・Nautobot・Kafbat UI）は、Web の EC2 を踏み台にした SSM のポートフォワーディングで PC の localhost に開く。</a:t>
             </a:r>
           </a:p>
           <a:p>
@@ -4935,6 +4948,19 @@
                 <a:ea typeface="Noto Sans JP"/>
               </a:rPr>
               <a:t>・作るのは ops/up.sh、消すのは ops/down.sh。何を作るかは deploy.env（AGENT / PIPELINE / WORKFLOW など）。Nautobot は PIPELINE=1 ならいつも立つ。</a:t>
+            </a:r>
+          </a:p>
+          <a:p>
+            <a:pPr algn="l"/>
+            <a:r>
+              <a:rPr sz="1000" b="0">
+                <a:solidFill>
+                  <a:srgbClr val="232F3E"/>
+                </a:solidFill>
+                <a:latin typeface="Noto Sans JP"/>
+                <a:ea typeface="Noto Sans JP"/>
+              </a:rPr>
+              <a:t>・Spark の書き先は STORES（既定は s3,grafana,splunk）、何 AZ に置くかは &lt;リソース&gt;_AZ_NUM で選ぶ（既定は 1 AZ。MSK だけ 2 AZ）。</a:t>
             </a:r>
           </a:p>
         </p:txBody>
@@ -4971,6 +4997,165 @@
                 <a:ea typeface="Noto Sans JP"/>
               </a:rPr>
               <a:t>1 / 5</a:t>
+            </a:r>
+          </a:p>
+        </p:txBody>
+      </p:sp>
+      <p:sp>
+        <p:nvSpPr>
+          <p:cNvPr id="45" name="Rounded Rectangle 32"/>
+          <p:cNvSpPr/>
+          <p:nvPr/>
+        </p:nvSpPr>
+        <p:spPr>
+          <a:xfrm>
+            <a:off x="6089904" y="4251960"/>
+            <a:ext cx="2450592" cy="1600200"/>
+          </a:xfrm>
+          <a:prstGeom prst="roundRect">
+            <a:avLst>
+              <a:gd name="adj" fmla="val 6000"/>
+            </a:avLst>
+          </a:prstGeom>
+          <a:solidFill>
+            <a:srgbClr val="F4F7F9"/>
+          </a:solidFill>
+          <a:ln w="12700">
+            <a:solidFill>
+              <a:srgbClr val="C5CED6"/>
+            </a:solidFill>
+          </a:ln>
+          <a:effectLst/>
+        </p:spPr>
+        <p:style>
+          <a:lnRef idx="1">
+            <a:schemeClr val="accent1"/>
+          </a:lnRef>
+          <a:fillRef idx="3">
+            <a:schemeClr val="accent1"/>
+          </a:fillRef>
+          <a:effectRef idx="2">
+            <a:schemeClr val="accent1"/>
+          </a:effectRef>
+          <a:fontRef idx="minor">
+            <a:schemeClr val="lt1"/>
+          </a:fontRef>
+        </p:style>
+        <p:txBody>
+          <a:bodyPr rtlCol="0" anchor="ctr"/>
+          <a:lstStyle/>
+          <a:p>
+            <a:pPr algn="ctr"/>
+          </a:p>
+        </p:txBody>
+      </p:sp>
+      <p:sp>
+        <p:nvSpPr>
+          <p:cNvPr id="46" name="TextBox 33"/>
+          <p:cNvSpPr txBox="1"/>
+          <p:nvPr/>
+        </p:nvSpPr>
+        <p:spPr>
+          <a:xfrm>
+            <a:off x="6227064" y="4343400"/>
+            <a:ext cx="2176272" cy="320040"/>
+          </a:xfrm>
+          <a:prstGeom prst="rect">
+            <a:avLst/>
+          </a:prstGeom>
+          <a:noFill/>
+        </p:spPr>
+        <p:txBody>
+          <a:bodyPr wrap="square" anchor="t" lIns="27432" rIns="27432" tIns="27432" bIns="27432">
+            <a:spAutoFit/>
+          </a:bodyPr>
+          <a:lstStyle/>
+          <a:p>
+            <a:pPr algn="l"/>
+            <a:r>
+              <a:rPr sz="1200" b="1">
+                <a:solidFill>
+                  <a:srgbClr val="232F3E"/>
+                </a:solidFill>
+                <a:latin typeface="Noto Sans JP"/>
+                <a:ea typeface="Noto Sans JP"/>
+              </a:rPr>
+              <a:t>S3 Tables（履歴）</a:t>
+            </a:r>
+          </a:p>
+        </p:txBody>
+      </p:sp>
+      <p:sp>
+        <p:nvSpPr>
+          <p:cNvPr id="47" name="TextBox 34"/>
+          <p:cNvSpPr txBox="1"/>
+          <p:nvPr/>
+        </p:nvSpPr>
+        <p:spPr>
+          <a:xfrm>
+            <a:off x="6227064" y="4754880"/>
+            <a:ext cx="2176272" cy="1005840"/>
+          </a:xfrm>
+          <a:prstGeom prst="rect">
+            <a:avLst/>
+          </a:prstGeom>
+          <a:noFill/>
+        </p:spPr>
+        <p:txBody>
+          <a:bodyPr wrap="square" anchor="t" lIns="27432" rIns="27432" tIns="27432" bIns="27432">
+            <a:spAutoFit/>
+          </a:bodyPr>
+          <a:lstStyle/>
+          <a:p>
+            <a:pPr algn="l"/>
+            <a:r>
+              <a:rPr sz="950" b="0">
+                <a:solidFill>
+                  <a:srgbClr val="5A6775"/>
+                </a:solidFill>
+                <a:latin typeface="Noto Sans JP"/>
+                <a:ea typeface="Noto Sans JP"/>
+              </a:rPr>
+              <a:t>alert_events</a:t>
+            </a:r>
+          </a:p>
+          <a:p>
+            <a:pPr algn="l"/>
+            <a:r>
+              <a:rPr sz="950" b="0">
+                <a:solidFill>
+                  <a:srgbClr val="5A6775"/>
+                </a:solidFill>
+                <a:latin typeface="Noto Sans JP"/>
+                <a:ea typeface="Noto Sans JP"/>
+              </a:rPr>
+              <a:t>（アラートの開いた・閉じた）</a:t>
+            </a:r>
+          </a:p>
+          <a:p>
+            <a:pPr algn="l"/>
+            <a:r>
+              <a:rPr sz="950" b="0">
+                <a:solidFill>
+                  <a:srgbClr val="5A6775"/>
+                </a:solidFill>
+                <a:latin typeface="Noto Sans JP"/>
+                <a:ea typeface="Noto Sans JP"/>
+              </a:rPr>
+              <a:t>proposal_events</a:t>
+            </a:r>
+          </a:p>
+          <a:p>
+            <a:pPr algn="l"/>
+            <a:r>
+              <a:rPr sz="950" b="0">
+                <a:solidFill>
+                  <a:srgbClr val="5A6775"/>
+                </a:solidFill>
+                <a:latin typeface="Noto Sans JP"/>
+                <a:ea typeface="Noto Sans JP"/>
+              </a:rPr>
+              <a:t>（修復案と承認・適用の経過）</a:t>
             </a:r>
           </a:p>
         </p:txBody>
@@ -5700,6 +5885,19 @@
               <a:t>増やしても重複しない</a:t>
             </a:r>
           </a:p>
+          <a:p>
+            <a:pPr algn="ctr"/>
+            <a:r>
+              <a:rPr sz="850" b="0">
+                <a:solidFill>
+                  <a:srgbClr val="5A6775"/>
+                </a:solidFill>
+                <a:latin typeface="Noto Sans JP"/>
+                <a:ea typeface="Noto Sans JP"/>
+              </a:rPr>
+              <a:t>（TELEGRAF_AZ_NUM で増やす）</a:t>
+            </a:r>
+          </a:p>
         </p:txBody>
       </p:sp>
       <p:pic>
@@ -5890,7 +6088,7 @@
         </p:blipFill>
         <p:spPr>
           <a:xfrm>
-            <a:off x="11311128" y="3246120"/>
+            <a:off x="11311128" y="2240280"/>
             <a:ext cx="512064" cy="512064"/>
           </a:xfrm>
           <a:prstGeom prst="rect">
@@ -5906,7 +6104,7 @@
         </p:nvSpPr>
         <p:spPr>
           <a:xfrm>
-            <a:off x="10652760" y="3785615"/>
+            <a:off x="10652760" y="2779776"/>
             <a:ext cx="1828800" cy="914399"/>
           </a:xfrm>
           <a:prstGeom prst="rect">
@@ -6246,9 +6444,9 @@
           <p:nvPr/>
         </p:nvCxnSpPr>
         <p:spPr>
-          <a:xfrm>
-            <a:off x="9738360" y="3502152"/>
-            <a:ext cx="1508760" cy="0"/>
+          <a:xfrm flipV="1">
+            <a:off x="9738360" y="2606040"/>
+            <a:ext cx="1508760" cy="777240"/>
           </a:xfrm>
           <a:prstGeom prst="line">
             <a:avLst/>
@@ -6283,8 +6481,8 @@
         </p:nvSpPr>
         <p:spPr>
           <a:xfrm>
-            <a:off x="10927080" y="4572000"/>
-            <a:ext cx="3108960" cy="228600"/>
+            <a:off x="10927080" y="3703320"/>
+            <a:ext cx="3154680" cy="228600"/>
           </a:xfrm>
           <a:prstGeom prst="rect">
             <a:avLst/>
@@ -6306,151 +6504,7 @@
                 <a:latin typeface="Noto Sans JP"/>
                 <a:ea typeface="Noto Sans JP"/>
               </a:rPr>
-              <a:t>Spark の書き先</a:t>
-            </a:r>
-          </a:p>
-        </p:txBody>
-      </p:sp>
-      <p:sp>
-        <p:nvSpPr>
-          <p:cNvPr id="34" name="TextBox 33"/>
-          <p:cNvSpPr txBox="1"/>
-          <p:nvPr/>
-        </p:nvSpPr>
-        <p:spPr>
-          <a:xfrm>
-            <a:off x="10927080" y="4828032"/>
-            <a:ext cx="3200400" cy="274320"/>
-          </a:xfrm>
-          <a:prstGeom prst="rect">
-            <a:avLst/>
-          </a:prstGeom>
-          <a:noFill/>
-        </p:spPr>
-        <p:txBody>
-          <a:bodyPr wrap="square" anchor="t" lIns="27432" rIns="27432" tIns="27432" bIns="27432">
-            <a:spAutoFit/>
-          </a:bodyPr>
-          <a:lstStyle/>
-          <a:p>
-            <a:pPr algn="l"/>
-            <a:r>
-              <a:rPr sz="900" b="0">
-                <a:solidFill>
-                  <a:srgbClr val="232F3E"/>
-                </a:solidFill>
-                <a:latin typeface="Noto Sans JP"/>
-                <a:ea typeface="Noto Sans JP"/>
-              </a:rPr>
-              <a:t>・S3 Tables: 全トピック（正本）</a:t>
-            </a:r>
-          </a:p>
-        </p:txBody>
-      </p:sp>
-      <p:sp>
-        <p:nvSpPr>
-          <p:cNvPr id="35" name="TextBox 34"/>
-          <p:cNvSpPr txBox="1"/>
-          <p:nvPr/>
-        </p:nvSpPr>
-        <p:spPr>
-          <a:xfrm>
-            <a:off x="10927080" y="5157216"/>
-            <a:ext cx="3200400" cy="274320"/>
-          </a:xfrm>
-          <a:prstGeom prst="rect">
-            <a:avLst/>
-          </a:prstGeom>
-          <a:noFill/>
-        </p:spPr>
-        <p:txBody>
-          <a:bodyPr wrap="square" anchor="t" lIns="27432" rIns="27432" tIns="27432" bIns="27432">
-            <a:spAutoFit/>
-          </a:bodyPr>
-          <a:lstStyle/>
-          <a:p>
-            <a:pPr algn="l"/>
-            <a:r>
-              <a:rPr sz="900" b="0">
-                <a:solidFill>
-                  <a:srgbClr val="232F3E"/>
-                </a:solidFill>
-                <a:latin typeface="Noto Sans JP"/>
-                <a:ea typeface="Noto Sans JP"/>
-              </a:rPr>
-              <a:t>・OpenSearch: traps / logs</a:t>
-            </a:r>
-          </a:p>
-        </p:txBody>
-      </p:sp>
-      <p:sp>
-        <p:nvSpPr>
-          <p:cNvPr id="36" name="TextBox 35"/>
-          <p:cNvSpPr txBox="1"/>
-          <p:nvPr/>
-        </p:nvSpPr>
-        <p:spPr>
-          <a:xfrm>
-            <a:off x="10927080" y="5486400"/>
-            <a:ext cx="3200400" cy="274320"/>
-          </a:xfrm>
-          <a:prstGeom prst="rect">
-            <a:avLst/>
-          </a:prstGeom>
-          <a:noFill/>
-        </p:spPr>
-        <p:txBody>
-          <a:bodyPr wrap="square" anchor="t" lIns="27432" rIns="27432" tIns="27432" bIns="27432">
-            <a:spAutoFit/>
-          </a:bodyPr>
-          <a:lstStyle/>
-          <a:p>
-            <a:pPr algn="l"/>
-            <a:r>
-              <a:rPr sz="900" b="0">
-                <a:solidFill>
-                  <a:srgbClr val="232F3E"/>
-                </a:solidFill>
-                <a:latin typeface="Noto Sans JP"/>
-                <a:ea typeface="Noto Sans JP"/>
-              </a:rPr>
-              <a:t>・Prometheus: metrics / gnmi / mdt</a:t>
-            </a:r>
-          </a:p>
-        </p:txBody>
-      </p:sp>
-      <p:sp>
-        <p:nvSpPr>
-          <p:cNvPr id="37" name="TextBox 36"/>
-          <p:cNvSpPr txBox="1"/>
-          <p:nvPr/>
-        </p:nvSpPr>
-        <p:spPr>
-          <a:xfrm>
-            <a:off x="10927080" y="5815584"/>
-            <a:ext cx="3200400" cy="274320"/>
-          </a:xfrm>
-          <a:prstGeom prst="rect">
-            <a:avLst/>
-          </a:prstGeom>
-          <a:noFill/>
-        </p:spPr>
-        <p:txBody>
-          <a:bodyPr wrap="square" anchor="t" lIns="27432" rIns="27432" tIns="27432" bIns="27432">
-            <a:spAutoFit/>
-          </a:bodyPr>
-          <a:lstStyle/>
-          <a:p>
-            <a:pPr algn="l"/>
-            <a:r>
-              <a:rPr sz="900" b="0">
-                <a:solidFill>
-                  <a:srgbClr val="232F3E"/>
-                </a:solidFill>
-                <a:latin typeface="Noto Sans JP"/>
-                <a:ea typeface="Noto Sans JP"/>
-              </a:rPr>
-              <a:t>・Splunk（ECS）: 全トピック（SINK_SPLUNK=1）</a:t>
+              <a:t>Spark の書き先（STORES で選ぶ。既定は 3 つとも）</a:t>
             </a:r>
           </a:p>
         </p:txBody>
@@ -6560,7 +6614,7 @@
                 <a:latin typeface="Noto Sans JP"/>
                 <a:ea typeface="Noto Sans JP"/>
               </a:rPr>
-              <a:t>・SNMP のポーリングは SNMP_POLL=1 のときだけ（既定は trap だけ受ける）。</a:t>
+              <a:t>・SNMP のポーリングは既定で動く（SNMP_POLL=1。10 秒ごと）。SNMP_POLL=0 にすると trap だけ受ける。</a:t>
             </a:r>
           </a:p>
         </p:txBody>
@@ -6601,6 +6655,324 @@
           </a:p>
         </p:txBody>
       </p:sp>
+      <p:sp>
+        <p:nvSpPr>
+          <p:cNvPr id="41" name="TextBox 33"/>
+          <p:cNvSpPr txBox="1"/>
+          <p:nvPr/>
+        </p:nvSpPr>
+        <p:spPr>
+          <a:xfrm>
+            <a:off x="10927080" y="4023360"/>
+            <a:ext cx="3200400" cy="411480"/>
+          </a:xfrm>
+          <a:prstGeom prst="rect">
+            <a:avLst/>
+          </a:prstGeom>
+          <a:noFill/>
+        </p:spPr>
+        <p:txBody>
+          <a:bodyPr wrap="square" anchor="t" lIns="27432" rIns="27432" tIns="27432" bIns="27432">
+            <a:spAutoFit/>
+          </a:bodyPr>
+          <a:lstStyle/>
+          <a:p>
+            <a:pPr algn="l"/>
+            <a:r>
+              <a:rPr sz="900" b="0">
+                <a:solidFill>
+                  <a:srgbClr val="232F3E"/>
+                </a:solidFill>
+                <a:latin typeface="Noto Sans JP"/>
+                <a:ea typeface="Noto Sans JP"/>
+              </a:rPr>
+              <a:t>・s3 → S3 Tables の raw_telemetry</a:t>
+            </a:r>
+          </a:p>
+          <a:p>
+            <a:pPr algn="l"/>
+            <a:r>
+              <a:rPr sz="850" b="0">
+                <a:solidFill>
+                  <a:srgbClr val="5A6775"/>
+                </a:solidFill>
+                <a:latin typeface="Noto Sans JP"/>
+                <a:ea typeface="Noto Sans JP"/>
+              </a:rPr>
+              <a:t>　全トピックのメッセージ（正本）</a:t>
+            </a:r>
+          </a:p>
+        </p:txBody>
+      </p:sp>
+      <p:sp>
+        <p:nvSpPr>
+          <p:cNvPr id="42" name="TextBox 33"/>
+          <p:cNvSpPr txBox="1"/>
+          <p:nvPr/>
+        </p:nvSpPr>
+        <p:spPr>
+          <a:xfrm>
+            <a:off x="10927080" y="4526280"/>
+            <a:ext cx="3200400" cy="411480"/>
+          </a:xfrm>
+          <a:prstGeom prst="rect">
+            <a:avLst/>
+          </a:prstGeom>
+          <a:noFill/>
+        </p:spPr>
+        <p:txBody>
+          <a:bodyPr wrap="square" anchor="t" lIns="27432" rIns="27432" tIns="27432" bIns="27432">
+            <a:spAutoFit/>
+          </a:bodyPr>
+          <a:lstStyle/>
+          <a:p>
+            <a:pPr algn="l"/>
+            <a:r>
+              <a:rPr sz="900" b="0">
+                <a:solidFill>
+                  <a:srgbClr val="232F3E"/>
+                </a:solidFill>
+                <a:latin typeface="Noto Sans JP"/>
+                <a:ea typeface="Noto Sans JP"/>
+              </a:rPr>
+              <a:t>・grafana → OpenSearch Serverless</a:t>
+            </a:r>
+          </a:p>
+          <a:p>
+            <a:pPr algn="l"/>
+            <a:r>
+              <a:rPr sz="850" b="0">
+                <a:solidFill>
+                  <a:srgbClr val="5A6775"/>
+                </a:solidFill>
+                <a:latin typeface="Noto Sans JP"/>
+                <a:ea typeface="Noto Sans JP"/>
+              </a:rPr>
+              <a:t>　traps / logs（索引 snmp-logs）</a:t>
+            </a:r>
+          </a:p>
+        </p:txBody>
+      </p:sp>
+      <p:sp>
+        <p:nvSpPr>
+          <p:cNvPr id="43" name="TextBox 33"/>
+          <p:cNvSpPr txBox="1"/>
+          <p:nvPr/>
+        </p:nvSpPr>
+        <p:spPr>
+          <a:xfrm>
+            <a:off x="10927080" y="5029200"/>
+            <a:ext cx="3200400" cy="411480"/>
+          </a:xfrm>
+          <a:prstGeom prst="rect">
+            <a:avLst/>
+          </a:prstGeom>
+          <a:noFill/>
+        </p:spPr>
+        <p:txBody>
+          <a:bodyPr wrap="square" anchor="t" lIns="27432" rIns="27432" tIns="27432" bIns="27432">
+            <a:spAutoFit/>
+          </a:bodyPr>
+          <a:lstStyle/>
+          <a:p>
+            <a:pPr algn="l"/>
+            <a:r>
+              <a:rPr sz="900" b="0">
+                <a:solidFill>
+                  <a:srgbClr val="232F3E"/>
+                </a:solidFill>
+                <a:latin typeface="Noto Sans JP"/>
+                <a:ea typeface="Noto Sans JP"/>
+              </a:rPr>
+              <a:t>・grafana → Managed Service for Prometheus</a:t>
+            </a:r>
+          </a:p>
+          <a:p>
+            <a:pPr algn="l"/>
+            <a:r>
+              <a:rPr sz="850" b="0">
+                <a:solidFill>
+                  <a:srgbClr val="5A6775"/>
+                </a:solidFill>
+                <a:latin typeface="Noto Sans JP"/>
+                <a:ea typeface="Noto Sans JP"/>
+              </a:rPr>
+              <a:t>　metrics / gnmi / mdt の数値</a:t>
+            </a:r>
+          </a:p>
+        </p:txBody>
+      </p:sp>
+      <p:sp>
+        <p:nvSpPr>
+          <p:cNvPr id="44" name="TextBox 33"/>
+          <p:cNvSpPr txBox="1"/>
+          <p:nvPr/>
+        </p:nvSpPr>
+        <p:spPr>
+          <a:xfrm>
+            <a:off x="10927080" y="5532120"/>
+            <a:ext cx="3200400" cy="411480"/>
+          </a:xfrm>
+          <a:prstGeom prst="rect">
+            <a:avLst/>
+          </a:prstGeom>
+          <a:noFill/>
+        </p:spPr>
+        <p:txBody>
+          <a:bodyPr wrap="square" anchor="t" lIns="27432" rIns="27432" tIns="27432" bIns="27432">
+            <a:spAutoFit/>
+          </a:bodyPr>
+          <a:lstStyle/>
+          <a:p>
+            <a:pPr algn="l"/>
+            <a:r>
+              <a:rPr sz="900" b="0">
+                <a:solidFill>
+                  <a:srgbClr val="232F3E"/>
+                </a:solidFill>
+                <a:latin typeface="Noto Sans JP"/>
+                <a:ea typeface="Noto Sans JP"/>
+              </a:rPr>
+              <a:t>・splunk → Splunk（ECS）の HEC</a:t>
+            </a:r>
+          </a:p>
+          <a:p>
+            <a:pPr algn="l"/>
+            <a:r>
+              <a:rPr sz="850" b="0">
+                <a:solidFill>
+                  <a:srgbClr val="5A6775"/>
+                </a:solidFill>
+                <a:latin typeface="Noto Sans JP"/>
+                <a:ea typeface="Noto Sans JP"/>
+              </a:rPr>
+              <a:t>　全トピック</a:t>
+            </a:r>
+          </a:p>
+        </p:txBody>
+      </p:sp>
+      <p:pic>
+        <p:nvPicPr>
+          <p:cNvPr id="45" name="Picture 44" descr="image.png"/>
+          <p:cNvPicPr>
+            <a:picLocks noChangeAspect="1"/>
+          </p:cNvPicPr>
+          <p:nvPr/>
+        </p:nvPicPr>
+        <p:blipFill>
+          <a:blip r:embed="rId4"/>
+          <a:stretch>
+            <a:fillRect/>
+          </a:stretch>
+        </p:blipFill>
+        <p:spPr>
+          <a:xfrm>
+            <a:off x="9162288" y="4800600"/>
+            <a:ext cx="512064" cy="512064"/>
+          </a:xfrm>
+          <a:prstGeom prst="rect">
+            <a:avLst/>
+          </a:prstGeom>
+        </p:spPr>
+      </p:pic>
+      <p:sp>
+        <p:nvSpPr>
+          <p:cNvPr id="46" name="TextBox 21"/>
+          <p:cNvSpPr txBox="1"/>
+          <p:nvPr/>
+        </p:nvSpPr>
+        <p:spPr>
+          <a:xfrm>
+            <a:off x="8549640" y="5340096"/>
+            <a:ext cx="1737360" cy="914399"/>
+          </a:xfrm>
+          <a:prstGeom prst="rect">
+            <a:avLst/>
+          </a:prstGeom>
+          <a:noFill/>
+        </p:spPr>
+        <p:txBody>
+          <a:bodyPr wrap="square" anchor="t" lIns="27432" rIns="27432" tIns="27432" bIns="27432">
+            <a:spAutoFit/>
+          </a:bodyPr>
+          <a:lstStyle/>
+          <a:p>
+            <a:pPr algn="ctr"/>
+            <a:r>
+              <a:rPr sz="1000" b="1">
+                <a:solidFill>
+                  <a:srgbClr val="232F3E"/>
+                </a:solidFill>
+                <a:latin typeface="Noto Sans JP"/>
+                <a:ea typeface="Noto Sans JP"/>
+              </a:rPr>
+              <a:t>Kafbat UI（ECS）</a:t>
+            </a:r>
+          </a:p>
+          <a:p>
+            <a:pPr algn="ctr"/>
+            <a:r>
+              <a:rPr sz="850" b="0">
+                <a:solidFill>
+                  <a:srgbClr val="5A6775"/>
+                </a:solidFill>
+                <a:latin typeface="Noto Sans JP"/>
+                <a:ea typeface="Noto Sans JP"/>
+              </a:rPr>
+              <a:t>トピックとメッセージを</a:t>
+            </a:r>
+          </a:p>
+          <a:p>
+            <a:pPr algn="ctr"/>
+            <a:r>
+              <a:rPr sz="850" b="0">
+                <a:solidFill>
+                  <a:srgbClr val="5A6775"/>
+                </a:solidFill>
+                <a:latin typeface="Noto Sans JP"/>
+                <a:ea typeface="Noto Sans JP"/>
+              </a:rPr>
+              <a:t>見る画面（いつも 1 つ）</a:t>
+            </a:r>
+          </a:p>
+        </p:txBody>
+      </p:sp>
+      <p:cxnSp>
+        <p:nvCxnSpPr>
+          <p:cNvPr id="47" name="Connector 31"/>
+          <p:cNvCxnSpPr/>
+          <p:nvPr/>
+        </p:nvCxnSpPr>
+        <p:spPr>
+          <a:xfrm flipV="1">
+            <a:off x="9418320" y="4407408"/>
+            <a:ext cx="0" cy="347472"/>
+          </a:xfrm>
+          <a:prstGeom prst="line">
+            <a:avLst/>
+          </a:prstGeom>
+          <a:ln w="19050">
+            <a:solidFill>
+              <a:srgbClr val="6B7785"/>
+            </a:solidFill>
+            <a:tailEnd type="triangle" w="med" len="med"/>
+          </a:ln>
+        </p:spPr>
+        <p:style>
+          <a:lnRef idx="2">
+            <a:schemeClr val="accent1"/>
+          </a:lnRef>
+          <a:fillRef idx="0">
+            <a:schemeClr val="accent1"/>
+          </a:fillRef>
+          <a:effectRef idx="1">
+            <a:schemeClr val="accent1"/>
+          </a:effectRef>
+          <a:fontRef idx="minor">
+            <a:schemeClr val="tx1"/>
+          </a:fontRef>
+        </p:style>
+      </p:cxnSp>
     </p:spTree>
   </p:cSld>
   <p:clrMapOvr>
@@ -6686,7 +7058,7 @@
                 <a:latin typeface="Noto Sans JP"/>
                 <a:ea typeface="Noto Sans JP"/>
               </a:rPr>
-              <a:t>アラートは SNS のトピック 1 つに集める。トポロジの status を書き換え、ワークフローが調査 → 人の承認 → 修復と進める。</a:t>
+              <a:t>アラートは SNS のトピック 1 つに集める。トポロジの status を書き換えて履歴に残し、ワークフローが調査 → 人の承認 → 修復と進める。</a:t>
             </a:r>
           </a:p>
         </p:txBody>
@@ -6827,7 +7199,7 @@
         <p:spPr>
           <a:xfrm>
             <a:off x="5577840" y="1600200"/>
-            <a:ext cx="8595360" cy="2103120"/>
+            <a:ext cx="8595360" cy="2560320"/>
           </a:xfrm>
           <a:prstGeom prst="roundRect">
             <a:avLst>
@@ -6897,7 +7269,7 @@
                 <a:latin typeface="Noto Sans JP"/>
                 <a:ea typeface="Noto Sans JP"/>
               </a:rPr>
-              <a:t>トポロジに映す（graph）</a:t>
+              <a:t>トポロジに映し、履歴に残す（graph・analytics）</a:t>
             </a:r>
           </a:p>
         </p:txBody>
@@ -6910,8 +7282,8 @@
         </p:nvSpPr>
         <p:spPr>
           <a:xfrm>
-            <a:off x="5577840" y="3931920"/>
-            <a:ext cx="8595360" cy="3886200"/>
+            <a:off x="5577840" y="4343400"/>
+            <a:ext cx="8595360" cy="3474720"/>
           </a:xfrm>
           <a:prstGeom prst="roundRect">
             <a:avLst>
@@ -6958,7 +7330,7 @@
         </p:nvSpPr>
         <p:spPr>
           <a:xfrm>
-            <a:off x="5687568" y="3986783"/>
+            <a:off x="5687568" y="4398264"/>
             <a:ext cx="8375904" cy="292608"/>
           </a:xfrm>
           <a:prstGeom prst="rect">
@@ -7054,7 +7426,7 @@
                 <a:latin typeface="Noto Sans JP"/>
                 <a:ea typeface="Noto Sans JP"/>
               </a:rPr>
-              <a:t>アラートルール</a:t>
+              <a:t>アラートルール 4 つ</a:t>
             </a:r>
           </a:p>
           <a:p>
@@ -7067,7 +7439,20 @@
                 <a:latin typeface="Noto Sans JP"/>
                 <a:ea typeface="Noto Sans JP"/>
               </a:rPr>
-              <a:t>link_down（SNMP）</a:t>
+              <a:t>link_down / bgp_down</a:t>
+            </a:r>
+          </a:p>
+          <a:p>
+            <a:pPr algn="ctr"/>
+            <a:r>
+              <a:rPr sz="850" b="0">
+                <a:solidFill>
+                  <a:srgbClr val="5A6775"/>
+                </a:solidFill>
+                <a:latin typeface="Noto Sans JP"/>
+                <a:ea typeface="Noto Sans JP"/>
+              </a:rPr>
+              <a:t>isis_down / trap</a:t>
             </a:r>
           </a:p>
         </p:txBody>
@@ -7140,7 +7525,7 @@
                 <a:latin typeface="Noto Sans JP"/>
                 <a:ea typeface="Noto Sans JP"/>
               </a:rPr>
-              <a:t>保存済みサーチ</a:t>
+              <a:t>保存済みサーチ 4 つ</a:t>
             </a:r>
           </a:p>
           <a:p>
@@ -7153,7 +7538,20 @@
                 <a:latin typeface="Noto Sans JP"/>
                 <a:ea typeface="Noto Sans JP"/>
               </a:rPr>
-              <a:t>trap / BGP / IS-IS</a:t>
+              <a:t>Grafana と同じ 4 種類</a:t>
+            </a:r>
+          </a:p>
+          <a:p>
+            <a:pPr algn="ctr"/>
+            <a:r>
+              <a:rPr sz="850" b="0">
+                <a:solidFill>
+                  <a:srgbClr val="5A6775"/>
+                </a:solidFill>
+                <a:latin typeface="Noto Sans JP"/>
+                <a:ea typeface="Noto Sans JP"/>
+              </a:rPr>
+              <a:t>trap からの link_down はここだけ</a:t>
             </a:r>
           </a:p>
         </p:txBody>
@@ -7272,7 +7670,20 @@
                 <a:latin typeface="Noto Sans JP"/>
                 <a:ea typeface="Noto Sans JP"/>
               </a:rPr>
-              <a:t>同じ障害を 1 つにまとめる</a:t>
+              <a:t>Grafana と Splunk の通知が</a:t>
+            </a:r>
+          </a:p>
+          <a:p>
+            <a:pPr algn="ctr"/>
+            <a:r>
+              <a:rPr sz="850" b="0">
+                <a:solidFill>
+                  <a:srgbClr val="5A6775"/>
+                </a:solidFill>
+                <a:latin typeface="Noto Sans JP"/>
+                <a:ea typeface="Noto Sans JP"/>
+              </a:rPr>
+              <a:t>ここに集まる</a:t>
             </a:r>
           </a:p>
         </p:txBody>
@@ -7293,7 +7704,7 @@
         </p:blipFill>
         <p:spPr>
           <a:xfrm>
-            <a:off x="6419088" y="2194560"/>
+            <a:off x="6419088" y="2651760"/>
             <a:ext cx="512064" cy="512064"/>
           </a:xfrm>
           <a:prstGeom prst="rect">
@@ -7309,8 +7720,8 @@
         </p:nvSpPr>
         <p:spPr>
           <a:xfrm>
-            <a:off x="5760720" y="2734056"/>
-            <a:ext cx="1828800" cy="640080"/>
+            <a:off x="5669280" y="3191256"/>
+            <a:ext cx="2011680" cy="640080"/>
           </a:xfrm>
           <a:prstGeom prst="rect">
             <a:avLst/>
@@ -7332,7 +7743,7 @@
                 <a:latin typeface="Noto Sans JP"/>
                 <a:ea typeface="Noto Sans JP"/>
               </a:rPr>
-              <a:t>graph の Lambda</a:t>
+              <a:t>AWS Lambda</a:t>
             </a:r>
           </a:p>
           <a:p>
@@ -7345,7 +7756,7 @@
                 <a:latin typeface="Noto Sans JP"/>
                 <a:ea typeface="Noto Sans JP"/>
               </a:rPr>
-              <a:t>status を書く</a:t>
+              <a:t>&lt;prefix&gt;-graph-status</a:t>
             </a:r>
           </a:p>
         </p:txBody>
@@ -7366,7 +7777,7 @@
         </p:blipFill>
         <p:spPr>
           <a:xfrm>
-            <a:off x="9162288" y="2194560"/>
+            <a:off x="9162288" y="2011680"/>
             <a:ext cx="512064" cy="512064"/>
           </a:xfrm>
           <a:prstGeom prst="rect">
@@ -7382,7 +7793,7 @@
         </p:nvSpPr>
         <p:spPr>
           <a:xfrm>
-            <a:off x="8229600" y="2734056"/>
+            <a:off x="8229600" y="2551176"/>
             <a:ext cx="2377440" cy="640080"/>
           </a:xfrm>
           <a:prstGeom prst="rect">
@@ -7405,7 +7816,7 @@
                 <a:latin typeface="Noto Sans JP"/>
                 <a:ea typeface="Noto Sans JP"/>
               </a:rPr>
-              <a:t>Amazon Neptune</a:t>
+              <a:t>Amazon Neptune Analytics</a:t>
             </a:r>
           </a:p>
           <a:p>
@@ -7418,7 +7829,7 @@
                 <a:latin typeface="Noto Sans JP"/>
                 <a:ea typeface="Noto Sans JP"/>
               </a:rPr>
-              <a:t>トポロジ・status・修復案</a:t>
+              <a:t>トポロジと status（修復案は置かない）</a:t>
             </a:r>
           </a:p>
         </p:txBody>
@@ -7439,7 +7850,7 @@
         </p:blipFill>
         <p:spPr>
           <a:xfrm>
-            <a:off x="12454128" y="2194560"/>
+            <a:off x="3950208" y="5440680"/>
             <a:ext cx="512064" cy="512064"/>
           </a:xfrm>
           <a:prstGeom prst="rect">
@@ -7455,8 +7866,8 @@
         </p:nvSpPr>
         <p:spPr>
           <a:xfrm>
-            <a:off x="11430000" y="2734056"/>
-            <a:ext cx="2560320" cy="640080"/>
+            <a:off x="2971800" y="5980176"/>
+            <a:ext cx="2468880" cy="640080"/>
           </a:xfrm>
           <a:prstGeom prst="rect">
             <a:avLst/>
@@ -7492,6 +7903,19 @@
                 <a:ea typeface="Noto Sans JP"/>
               </a:rPr>
               <a:t>承認タブで人が承認・却下</a:t>
+            </a:r>
+          </a:p>
+          <a:p>
+            <a:pPr algn="ctr"/>
+            <a:r>
+              <a:rPr sz="850" b="0">
+                <a:solidFill>
+                  <a:srgbClr val="5A6775"/>
+                </a:solidFill>
+                <a:latin typeface="Noto Sans JP"/>
+                <a:ea typeface="Noto Sans JP"/>
+              </a:rPr>
+              <a:t>（修復案は Athena で読む）</a:t>
             </a:r>
           </a:p>
         </p:txBody>
@@ -7512,7 +7936,7 @@
         </p:blipFill>
         <p:spPr>
           <a:xfrm>
-            <a:off x="6419088" y="4663440"/>
+            <a:off x="6419088" y="5029200"/>
             <a:ext cx="512064" cy="512064"/>
           </a:xfrm>
           <a:prstGeom prst="rect">
@@ -7528,8 +7952,8 @@
         </p:nvSpPr>
         <p:spPr>
           <a:xfrm>
-            <a:off x="5760720" y="5202936"/>
-            <a:ext cx="1828800" cy="640080"/>
+            <a:off x="5623560" y="5568696"/>
+            <a:ext cx="2103120" cy="640080"/>
           </a:xfrm>
           <a:prstGeom prst="rect">
             <a:avLst/>
@@ -7551,7 +7975,7 @@
                 <a:latin typeface="Noto Sans JP"/>
                 <a:ea typeface="Noto Sans JP"/>
               </a:rPr>
-              <a:t>Amazon SQS</a:t>
+              <a:t>Amazon SQS（キュー 2 本）</a:t>
             </a:r>
           </a:p>
           <a:p>
@@ -7564,7 +7988,20 @@
                 <a:latin typeface="Noto Sans JP"/>
                 <a:ea typeface="Noto Sans JP"/>
               </a:rPr>
-              <a:t>アラートを受ける</a:t>
+              <a:t>&lt;prefix&gt;-anomalies（アラート）</a:t>
+            </a:r>
+          </a:p>
+          <a:p>
+            <a:pPr algn="ctr"/>
+            <a:r>
+              <a:rPr sz="850" b="0">
+                <a:solidFill>
+                  <a:srgbClr val="5A6775"/>
+                </a:solidFill>
+                <a:latin typeface="Noto Sans JP"/>
+                <a:ea typeface="Noto Sans JP"/>
+              </a:rPr>
+              <a:t>&lt;prefix&gt;-decisions（承認・却下）</a:t>
             </a:r>
           </a:p>
         </p:txBody>
@@ -7585,7 +8022,7 @@
         </p:blipFill>
         <p:spPr>
           <a:xfrm>
-            <a:off x="9162288" y="4663440"/>
+            <a:off x="9162288" y="5029200"/>
             <a:ext cx="512064" cy="512064"/>
           </a:xfrm>
           <a:prstGeom prst="rect">
@@ -7601,7 +8038,7 @@
         </p:nvSpPr>
         <p:spPr>
           <a:xfrm>
-            <a:off x="8412480" y="5202936"/>
+            <a:off x="8412480" y="5568696"/>
             <a:ext cx="2011680" cy="640080"/>
           </a:xfrm>
           <a:prstGeom prst="rect">
@@ -7637,7 +8074,7 @@
                 <a:latin typeface="Noto Sans JP"/>
                 <a:ea typeface="Noto Sans JP"/>
               </a:rPr>
-              <a:t>ワークフロー</a:t>
+              <a:t>ワークフローと worker</a:t>
             </a:r>
           </a:p>
         </p:txBody>
@@ -7658,7 +8095,7 @@
         </p:blipFill>
         <p:spPr>
           <a:xfrm>
-            <a:off x="12454128" y="4663440"/>
+            <a:off x="12454128" y="5029200"/>
             <a:ext cx="512064" cy="512064"/>
           </a:xfrm>
           <a:prstGeom prst="rect">
@@ -7674,7 +8111,7 @@
         </p:nvSpPr>
         <p:spPr>
           <a:xfrm>
-            <a:off x="11338560" y="5202936"/>
+            <a:off x="11338560" y="5568696"/>
             <a:ext cx="2743200" cy="1188720"/>
           </a:xfrm>
           <a:prstGeom prst="rect">
@@ -7736,7 +8173,7 @@
                 <a:latin typeface="Noto Sans JP"/>
                 <a:ea typeface="Noto Sans JP"/>
               </a:rPr>
-              <a:t>Neptune・ログ・メトリクスを読む</a:t>
+              <a:t>トポロジ・ログ・メトリクス・履歴を読む</a:t>
             </a:r>
           </a:p>
         </p:txBody>
@@ -7894,8 +8331,8 @@
         </p:nvCxnSpPr>
         <p:spPr>
           <a:xfrm flipV="1">
-            <a:off x="4526280" y="2560320"/>
-            <a:ext cx="1828800" cy="1097280"/>
+            <a:off x="4526280" y="2971800"/>
+            <a:ext cx="1828800" cy="685800"/>
           </a:xfrm>
           <a:prstGeom prst="line">
             <a:avLst/>
@@ -7930,8 +8367,8 @@
         </p:nvCxnSpPr>
         <p:spPr>
           <a:xfrm>
-            <a:off x="4526280" y="3977639"/>
-            <a:ext cx="1828800" cy="868681"/>
+            <a:off x="4526280" y="3977640"/>
+            <a:ext cx="1828800" cy="1188720"/>
           </a:xfrm>
           <a:prstGeom prst="line">
             <a:avLst/>
@@ -7965,9 +8402,783 @@
           <p:nvPr/>
         </p:nvCxnSpPr>
         <p:spPr>
-          <a:xfrm>
-            <a:off x="6995160" y="2450592"/>
+          <a:xfrm flipV="1">
+            <a:off x="6995160" y="2286000"/>
+            <a:ext cx="2103120" cy="502920"/>
+          </a:xfrm>
+          <a:prstGeom prst="line">
+            <a:avLst/>
+          </a:prstGeom>
+          <a:ln w="19050">
+            <a:solidFill>
+              <a:srgbClr val="6B7785"/>
+            </a:solidFill>
+            <a:tailEnd type="triangle" w="med" len="med"/>
+          </a:ln>
+        </p:spPr>
+        <p:style>
+          <a:lnRef idx="2">
+            <a:schemeClr val="accent1"/>
+          </a:lnRef>
+          <a:fillRef idx="0">
+            <a:schemeClr val="accent1"/>
+          </a:fillRef>
+          <a:effectRef idx="1">
+            <a:schemeClr val="accent1"/>
+          </a:effectRef>
+          <a:fontRef idx="minor">
+            <a:schemeClr val="tx1"/>
+          </a:fontRef>
+        </p:style>
+      </p:cxnSp>
+      <p:sp>
+        <p:nvSpPr>
+          <p:cNvPr id="37" name="TextBox 36"/>
+          <p:cNvSpPr txBox="1"/>
+          <p:nvPr/>
+        </p:nvSpPr>
+        <p:spPr>
+          <a:xfrm>
+            <a:off x="4572000" y="5248656"/>
+            <a:ext cx="1005840" cy="219456"/>
+          </a:xfrm>
+          <a:prstGeom prst="rect">
+            <a:avLst/>
+          </a:prstGeom>
+          <a:noFill/>
+        </p:spPr>
+        <p:txBody>
+          <a:bodyPr wrap="square" anchor="t" lIns="27432" rIns="27432" tIns="27432" bIns="27432">
+            <a:spAutoFit/>
+          </a:bodyPr>
+          <a:lstStyle/>
+          <a:p>
+            <a:pPr algn="ctr"/>
+            <a:r>
+              <a:rPr sz="800" b="0">
+                <a:solidFill>
+                  <a:srgbClr val="5A6775"/>
+                </a:solidFill>
+                <a:latin typeface="Noto Sans JP"/>
+                <a:ea typeface="Noto Sans JP"/>
+              </a:rPr>
+              <a:t>承認・却下を送る</a:t>
+            </a:r>
+          </a:p>
+        </p:txBody>
+      </p:sp>
+      <p:cxnSp>
+        <p:nvCxnSpPr>
+          <p:cNvPr id="38" name="Connector 37"/>
+          <p:cNvCxnSpPr/>
+          <p:nvPr/>
+        </p:nvCxnSpPr>
+        <p:spPr>
+          <a:xfrm>
+            <a:off x="6995160" y="5285232"/>
             <a:ext cx="2103120" cy="0"/>
+          </a:xfrm>
+          <a:prstGeom prst="line">
+            <a:avLst/>
+          </a:prstGeom>
+          <a:ln w="19050">
+            <a:solidFill>
+              <a:srgbClr val="6B7785"/>
+            </a:solidFill>
+            <a:tailEnd type="triangle" w="med" len="med"/>
+          </a:ln>
+        </p:spPr>
+        <p:style>
+          <a:lnRef idx="2">
+            <a:schemeClr val="accent1"/>
+          </a:lnRef>
+          <a:fillRef idx="0">
+            <a:schemeClr val="accent1"/>
+          </a:fillRef>
+          <a:effectRef idx="1">
+            <a:schemeClr val="accent1"/>
+          </a:effectRef>
+          <a:fontRef idx="minor">
+            <a:schemeClr val="tx1"/>
+          </a:fontRef>
+        </p:style>
+      </p:cxnSp>
+      <p:sp>
+        <p:nvSpPr>
+          <p:cNvPr id="39" name="TextBox 38"/>
+          <p:cNvSpPr txBox="1"/>
+          <p:nvPr/>
+        </p:nvSpPr>
+        <p:spPr>
+          <a:xfrm>
+            <a:off x="7644384" y="5029200"/>
+            <a:ext cx="800100" cy="219456"/>
+          </a:xfrm>
+          <a:prstGeom prst="rect">
+            <a:avLst/>
+          </a:prstGeom>
+          <a:noFill/>
+        </p:spPr>
+        <p:txBody>
+          <a:bodyPr wrap="square" anchor="t" lIns="27432" rIns="27432" tIns="27432" bIns="27432">
+            <a:spAutoFit/>
+          </a:bodyPr>
+          <a:lstStyle/>
+          <a:p>
+            <a:pPr algn="ctr"/>
+            <a:r>
+              <a:rPr sz="800" b="0">
+                <a:solidFill>
+                  <a:srgbClr val="5A6775"/>
+                </a:solidFill>
+                <a:latin typeface="Noto Sans JP"/>
+                <a:ea typeface="Noto Sans JP"/>
+              </a:rPr>
+              <a:t>起動・解消</a:t>
+            </a:r>
+          </a:p>
+        </p:txBody>
+      </p:sp>
+      <p:cxnSp>
+        <p:nvCxnSpPr>
+          <p:cNvPr id="40" name="Connector 39"/>
+          <p:cNvCxnSpPr/>
+          <p:nvPr/>
+        </p:nvCxnSpPr>
+        <p:spPr>
+          <a:xfrm>
+            <a:off x="9738360" y="5285232"/>
+            <a:ext cx="2651760" cy="0"/>
+          </a:xfrm>
+          <a:prstGeom prst="line">
+            <a:avLst/>
+          </a:prstGeom>
+          <a:ln w="19050">
+            <a:solidFill>
+              <a:srgbClr val="6B7785"/>
+            </a:solidFill>
+            <a:tailEnd type="triangle" w="med" len="med"/>
+          </a:ln>
+        </p:spPr>
+        <p:style>
+          <a:lnRef idx="2">
+            <a:schemeClr val="accent1"/>
+          </a:lnRef>
+          <a:fillRef idx="0">
+            <a:schemeClr val="accent1"/>
+          </a:fillRef>
+          <a:effectRef idx="1">
+            <a:schemeClr val="accent1"/>
+          </a:effectRef>
+          <a:fontRef idx="minor">
+            <a:schemeClr val="tx1"/>
+          </a:fontRef>
+        </p:style>
+      </p:cxnSp>
+      <p:sp>
+        <p:nvSpPr>
+          <p:cNvPr id="41" name="TextBox 40"/>
+          <p:cNvSpPr txBox="1"/>
+          <p:nvPr/>
+        </p:nvSpPr>
+        <p:spPr>
+          <a:xfrm>
+            <a:off x="10415016" y="5029200"/>
+            <a:ext cx="1293876" cy="219456"/>
+          </a:xfrm>
+          <a:prstGeom prst="rect">
+            <a:avLst/>
+          </a:prstGeom>
+          <a:noFill/>
+        </p:spPr>
+        <p:txBody>
+          <a:bodyPr wrap="square" anchor="t" lIns="27432" rIns="27432" tIns="27432" bIns="27432">
+            <a:spAutoFit/>
+          </a:bodyPr>
+          <a:lstStyle/>
+          <a:p>
+            <a:pPr algn="ctr"/>
+            <a:r>
+              <a:rPr sz="800" b="0">
+                <a:solidFill>
+                  <a:srgbClr val="5A6775"/>
+                </a:solidFill>
+                <a:latin typeface="Noto Sans JP"/>
+                <a:ea typeface="Noto Sans JP"/>
+              </a:rPr>
+              <a:t>原因と修復案を聞く</a:t>
+            </a:r>
+          </a:p>
+        </p:txBody>
+      </p:sp>
+      <p:cxnSp>
+        <p:nvCxnSpPr>
+          <p:cNvPr id="44" name="Connector 43"/>
+          <p:cNvCxnSpPr/>
+          <p:nvPr/>
+        </p:nvCxnSpPr>
+        <p:spPr>
+          <a:xfrm>
+            <a:off x="9418320" y="6016752"/>
+            <a:ext cx="0" cy="521208"/>
+          </a:xfrm>
+          <a:prstGeom prst="line">
+            <a:avLst/>
+          </a:prstGeom>
+          <a:ln w="19050">
+            <a:solidFill>
+              <a:srgbClr val="6B7785"/>
+            </a:solidFill>
+            <a:tailEnd type="triangle" w="med" len="med"/>
+          </a:ln>
+        </p:spPr>
+        <p:style>
+          <a:lnRef idx="2">
+            <a:schemeClr val="accent1"/>
+          </a:lnRef>
+          <a:fillRef idx="0">
+            <a:schemeClr val="accent1"/>
+          </a:fillRef>
+          <a:effectRef idx="1">
+            <a:schemeClr val="accent1"/>
+          </a:effectRef>
+          <a:fontRef idx="minor">
+            <a:schemeClr val="tx1"/>
+          </a:fontRef>
+        </p:style>
+      </p:cxnSp>
+      <p:sp>
+        <p:nvSpPr>
+          <p:cNvPr id="45" name="TextBox 44"/>
+          <p:cNvSpPr txBox="1"/>
+          <p:nvPr/>
+        </p:nvSpPr>
+        <p:spPr>
+          <a:xfrm>
+            <a:off x="7589520" y="6236208"/>
+            <a:ext cx="1783080" cy="219456"/>
+          </a:xfrm>
+          <a:prstGeom prst="rect">
+            <a:avLst/>
+          </a:prstGeom>
+          <a:noFill/>
+        </p:spPr>
+        <p:txBody>
+          <a:bodyPr wrap="square" anchor="t" lIns="27432" rIns="27432" tIns="27432" bIns="27432">
+            <a:spAutoFit/>
+          </a:bodyPr>
+          <a:lstStyle/>
+          <a:p>
+            <a:pPr algn="ctr"/>
+            <a:r>
+              <a:rPr sz="800" b="0">
+                <a:solidFill>
+                  <a:srgbClr val="5A6775"/>
+                </a:solidFill>
+                <a:latin typeface="Noto Sans JP"/>
+                <a:ea typeface="Noto Sans JP"/>
+              </a:rPr>
+              <a:t>承認されたら SSM Run Command</a:t>
+            </a:r>
+          </a:p>
+        </p:txBody>
+      </p:sp>
+      <p:sp>
+        <p:nvSpPr>
+          <p:cNvPr id="46" name="TextBox 45"/>
+          <p:cNvSpPr txBox="1"/>
+          <p:nvPr/>
+        </p:nvSpPr>
+        <p:spPr>
+          <a:xfrm>
+            <a:off x="5715000" y="6583680"/>
+            <a:ext cx="2743200" cy="1097280"/>
+          </a:xfrm>
+          <a:prstGeom prst="rect">
+            <a:avLst/>
+          </a:prstGeom>
+          <a:noFill/>
+        </p:spPr>
+        <p:txBody>
+          <a:bodyPr wrap="square" anchor="t" lIns="27432" rIns="27432" tIns="27432" bIns="27432">
+            <a:spAutoFit/>
+          </a:bodyPr>
+          <a:lstStyle/>
+          <a:p>
+            <a:pPr algn="l"/>
+            <a:r>
+              <a:rPr sz="900" b="0">
+                <a:solidFill>
+                  <a:srgbClr val="5A6775"/>
+                </a:solidFill>
+                <a:latin typeface="Noto Sans JP"/>
+                <a:ea typeface="Noto Sans JP"/>
+              </a:rPr>
+              <a:t>・ワークフローを起こすのは link_down だけ</a:t>
+            </a:r>
+          </a:p>
+          <a:p>
+            <a:pPr algn="l"/>
+            <a:r>
+              <a:rPr sz="900" b="0">
+                <a:solidFill>
+                  <a:srgbClr val="5A6775"/>
+                </a:solidFill>
+                <a:latin typeface="Noto Sans JP"/>
+                <a:ea typeface="Noto Sans JP"/>
+              </a:rPr>
+              <a:t>・修復案の置き場は S3 Tables だけ</a:t>
+            </a:r>
+          </a:p>
+          <a:p>
+            <a:pPr algn="l"/>
+            <a:r>
+              <a:rPr sz="900" b="0">
+                <a:solidFill>
+                  <a:srgbClr val="5A6775"/>
+                </a:solidFill>
+                <a:latin typeface="Noto Sans JP"/>
+                <a:ea typeface="Noto Sans JP"/>
+              </a:rPr>
+              <a:t>　（Web と AI エージェントは Athena で読む）</a:t>
+            </a:r>
+          </a:p>
+          <a:p>
+            <a:pPr algn="l"/>
+            <a:r>
+              <a:rPr sz="900" b="0">
+                <a:solidFill>
+                  <a:srgbClr val="5A6775"/>
+                </a:solidFill>
+                <a:latin typeface="Noto Sans JP"/>
+                <a:ea typeface="Noto Sans JP"/>
+              </a:rPr>
+              <a:t>・承認を押してから反映まで数秒〜20 秒</a:t>
+            </a:r>
+          </a:p>
+        </p:txBody>
+      </p:sp>
+      <p:sp>
+        <p:nvSpPr>
+          <p:cNvPr id="47" name="TextBox 46"/>
+          <p:cNvSpPr txBox="1"/>
+          <p:nvPr/>
+        </p:nvSpPr>
+        <p:spPr>
+          <a:xfrm>
+            <a:off x="13258800" y="7818120"/>
+            <a:ext cx="914400" cy="228600"/>
+          </a:xfrm>
+          <a:prstGeom prst="rect">
+            <a:avLst/>
+          </a:prstGeom>
+          <a:noFill/>
+        </p:spPr>
+        <p:txBody>
+          <a:bodyPr wrap="square" anchor="t" lIns="27432" rIns="27432" tIns="27432" bIns="27432">
+            <a:spAutoFit/>
+          </a:bodyPr>
+          <a:lstStyle/>
+          <a:p>
+            <a:pPr algn="r"/>
+            <a:r>
+              <a:rPr sz="850" b="0">
+                <a:solidFill>
+                  <a:srgbClr val="5A6775"/>
+                </a:solidFill>
+                <a:latin typeface="Noto Sans JP"/>
+                <a:ea typeface="Noto Sans JP"/>
+              </a:rPr>
+              <a:t>3 / 5</a:t>
+            </a:r>
+          </a:p>
+        </p:txBody>
+      </p:sp>
+      <p:sp>
+        <p:nvSpPr>
+          <p:cNvPr id="48" name="TextBox 45"/>
+          <p:cNvSpPr txBox="1"/>
+          <p:nvPr/>
+        </p:nvSpPr>
+        <p:spPr>
+          <a:xfrm>
+            <a:off x="566928" y="6583680"/>
+            <a:ext cx="2194560" cy="1005840"/>
+          </a:xfrm>
+          <a:prstGeom prst="rect">
+            <a:avLst/>
+          </a:prstGeom>
+          <a:noFill/>
+        </p:spPr>
+        <p:txBody>
+          <a:bodyPr wrap="square" anchor="t" lIns="27432" rIns="27432" tIns="27432" bIns="27432">
+            <a:spAutoFit/>
+          </a:bodyPr>
+          <a:lstStyle/>
+          <a:p>
+            <a:pPr algn="l"/>
+            <a:r>
+              <a:rPr sz="900" b="0">
+                <a:solidFill>
+                  <a:srgbClr val="5A6775"/>
+                </a:solidFill>
+                <a:latin typeface="Noto Sans JP"/>
+                <a:ea typeface="Noto Sans JP"/>
+              </a:rPr>
+              <a:t>SPLUNK_AZ_NUM が 2 か 3 のとき</a:t>
+            </a:r>
+          </a:p>
+          <a:p>
+            <a:pPr algn="l"/>
+            <a:r>
+              <a:rPr sz="900" b="0">
+                <a:solidFill>
+                  <a:srgbClr val="5A6775"/>
+                </a:solidFill>
+                <a:latin typeface="Noto Sans JP"/>
+                <a:ea typeface="Noto Sans JP"/>
+              </a:rPr>
+              <a:t>Splunk は indexer のクラスター。</a:t>
+            </a:r>
+          </a:p>
+          <a:p>
+            <a:pPr algn="l"/>
+            <a:r>
+              <a:rPr sz="900" b="0">
+                <a:solidFill>
+                  <a:srgbClr val="5A6775"/>
+                </a:solidFill>
+                <a:latin typeface="Noto Sans JP"/>
+                <a:ea typeface="Noto Sans JP"/>
+              </a:rPr>
+              <a:t>・cluster manager 1</a:t>
+            </a:r>
+          </a:p>
+          <a:p>
+            <a:pPr algn="l"/>
+            <a:r>
+              <a:rPr sz="900" b="0">
+                <a:solidFill>
+                  <a:srgbClr val="5A6775"/>
+                </a:solidFill>
+                <a:latin typeface="Noto Sans JP"/>
+                <a:ea typeface="Noto Sans JP"/>
+              </a:rPr>
+              <a:t>・indexer を AZ の数だけ</a:t>
+            </a:r>
+          </a:p>
+          <a:p>
+            <a:pPr algn="l"/>
+            <a:r>
+              <a:rPr sz="900" b="0">
+                <a:solidFill>
+                  <a:srgbClr val="5A6775"/>
+                </a:solidFill>
+                <a:latin typeface="Noto Sans JP"/>
+                <a:ea typeface="Noto Sans JP"/>
+              </a:rPr>
+              <a:t>・search head 1（アラートを出す）</a:t>
+            </a:r>
+          </a:p>
+        </p:txBody>
+      </p:sp>
+      <p:sp>
+        <p:nvSpPr>
+          <p:cNvPr id="49" name="TextBox 36"/>
+          <p:cNvSpPr txBox="1"/>
+          <p:nvPr/>
+        </p:nvSpPr>
+        <p:spPr>
+          <a:xfrm>
+            <a:off x="7086600" y="2212848"/>
+            <a:ext cx="1005840" cy="219456"/>
+          </a:xfrm>
+          <a:prstGeom prst="rect">
+            <a:avLst/>
+          </a:prstGeom>
+          <a:noFill/>
+        </p:spPr>
+        <p:txBody>
+          <a:bodyPr wrap="square" anchor="t" lIns="27432" rIns="27432" tIns="27432" bIns="27432">
+            <a:spAutoFit/>
+          </a:bodyPr>
+          <a:lstStyle/>
+          <a:p>
+            <a:pPr algn="ctr"/>
+            <a:r>
+              <a:rPr sz="800" b="0">
+                <a:solidFill>
+                  <a:srgbClr val="5A6775"/>
+                </a:solidFill>
+                <a:latin typeface="Noto Sans JP"/>
+                <a:ea typeface="Noto Sans JP"/>
+              </a:rPr>
+              <a:t>status を書く</a:t>
+            </a:r>
+          </a:p>
+        </p:txBody>
+      </p:sp>
+      <p:sp>
+        <p:nvSpPr>
+          <p:cNvPr id="50" name="Rounded Rectangle 14"/>
+          <p:cNvSpPr/>
+          <p:nvPr/>
+        </p:nvSpPr>
+        <p:spPr>
+          <a:xfrm>
+            <a:off x="9162288" y="3200400"/>
+            <a:ext cx="512064" cy="512064"/>
+          </a:xfrm>
+          <a:prstGeom prst="roundRect">
+            <a:avLst>
+              <a:gd name="adj" fmla="val 12000"/>
+            </a:avLst>
+          </a:prstGeom>
+          <a:solidFill>
+            <a:srgbClr val="8C4FFF"/>
+          </a:solidFill>
+          <a:ln w="12700">
+            <a:solidFill>
+              <a:srgbClr val="8C4FFF"/>
+            </a:solidFill>
+          </a:ln>
+          <a:effectLst/>
+        </p:spPr>
+        <p:style>
+          <a:lnRef idx="1">
+            <a:schemeClr val="accent1"/>
+          </a:lnRef>
+          <a:fillRef idx="3">
+            <a:schemeClr val="accent1"/>
+          </a:fillRef>
+          <a:effectRef idx="2">
+            <a:schemeClr val="accent1"/>
+          </a:effectRef>
+          <a:fontRef idx="minor">
+            <a:schemeClr val="lt1"/>
+          </a:fontRef>
+        </p:style>
+        <p:txBody>
+          <a:bodyPr rtlCol="0" anchor="ctr" lIns="0" rIns="0"/>
+          <a:lstStyle/>
+          <a:p>
+            <a:pPr algn="ctr"/>
+            <a:r>
+              <a:rPr sz="650" b="1">
+                <a:solidFill>
+                  <a:srgbClr val="FFFFFF"/>
+                </a:solidFill>
+                <a:latin typeface="Noto Sans JP"/>
+              </a:rPr>
+              <a:t>Firehose</a:t>
+            </a:r>
+          </a:p>
+        </p:txBody>
+      </p:sp>
+      <p:sp>
+        <p:nvSpPr>
+          <p:cNvPr id="51" name="TextBox 17"/>
+          <p:cNvSpPr txBox="1"/>
+          <p:nvPr/>
+        </p:nvSpPr>
+        <p:spPr>
+          <a:xfrm>
+            <a:off x="8229600" y="3739896"/>
+            <a:ext cx="2377440" cy="640080"/>
+          </a:xfrm>
+          <a:prstGeom prst="rect">
+            <a:avLst/>
+          </a:prstGeom>
+          <a:noFill/>
+        </p:spPr>
+        <p:txBody>
+          <a:bodyPr wrap="square" anchor="t" lIns="27432" rIns="27432" tIns="27432" bIns="27432">
+            <a:spAutoFit/>
+          </a:bodyPr>
+          <a:lstStyle/>
+          <a:p>
+            <a:pPr algn="ctr"/>
+            <a:r>
+              <a:rPr sz="1000" b="1">
+                <a:solidFill>
+                  <a:srgbClr val="232F3E"/>
+                </a:solidFill>
+                <a:latin typeface="Noto Sans JP"/>
+                <a:ea typeface="Noto Sans JP"/>
+              </a:rPr>
+              <a:t>Amazon Data Firehose</a:t>
+            </a:r>
+          </a:p>
+          <a:p>
+            <a:pPr algn="ctr"/>
+            <a:r>
+              <a:rPr sz="850" b="0">
+                <a:solidFill>
+                  <a:srgbClr val="5A6775"/>
+                </a:solidFill>
+                <a:latin typeface="Noto Sans JP"/>
+                <a:ea typeface="Noto Sans JP"/>
+              </a:rPr>
+              <a:t>60 秒ごとにまとめて書く</a:t>
+            </a:r>
+          </a:p>
+        </p:txBody>
+      </p:sp>
+      <p:cxnSp>
+        <p:nvCxnSpPr>
+          <p:cNvPr id="52" name="Connector 34"/>
+          <p:cNvCxnSpPr/>
+          <p:nvPr/>
+        </p:nvCxnSpPr>
+        <p:spPr>
+          <a:xfrm>
+            <a:off x="6995160" y="3035808"/>
+            <a:ext cx="2103120" cy="402336"/>
+          </a:xfrm>
+          <a:prstGeom prst="line">
+            <a:avLst/>
+          </a:prstGeom>
+          <a:ln w="19050">
+            <a:solidFill>
+              <a:srgbClr val="6B7785"/>
+            </a:solidFill>
+            <a:tailEnd type="triangle" w="med" len="med"/>
+          </a:ln>
+        </p:spPr>
+        <p:style>
+          <a:lnRef idx="2">
+            <a:schemeClr val="accent1"/>
+          </a:lnRef>
+          <a:fillRef idx="0">
+            <a:schemeClr val="accent1"/>
+          </a:fillRef>
+          <a:effectRef idx="1">
+            <a:schemeClr val="accent1"/>
+          </a:effectRef>
+          <a:fontRef idx="minor">
+            <a:schemeClr val="tx1"/>
+          </a:fontRef>
+        </p:style>
+      </p:cxnSp>
+      <p:sp>
+        <p:nvSpPr>
+          <p:cNvPr id="53" name="TextBox 36"/>
+          <p:cNvSpPr txBox="1"/>
+          <p:nvPr/>
+        </p:nvSpPr>
+        <p:spPr>
+          <a:xfrm>
+            <a:off x="7543800" y="3456432"/>
+            <a:ext cx="1280160" cy="219456"/>
+          </a:xfrm>
+          <a:prstGeom prst="rect">
+            <a:avLst/>
+          </a:prstGeom>
+          <a:noFill/>
+        </p:spPr>
+        <p:txBody>
+          <a:bodyPr wrap="square" anchor="t" lIns="27432" rIns="27432" tIns="27432" bIns="27432">
+            <a:spAutoFit/>
+          </a:bodyPr>
+          <a:lstStyle/>
+          <a:p>
+            <a:pPr algn="ctr"/>
+            <a:r>
+              <a:rPr sz="800" b="0">
+                <a:solidFill>
+                  <a:srgbClr val="5A6775"/>
+                </a:solidFill>
+                <a:latin typeface="Noto Sans JP"/>
+                <a:ea typeface="Noto Sans JP"/>
+              </a:rPr>
+              <a:t>通知を 1 件ずつ送る</a:t>
+            </a:r>
+          </a:p>
+        </p:txBody>
+      </p:sp>
+      <p:pic>
+        <p:nvPicPr>
+          <p:cNvPr id="54" name="Picture 53" descr="image.png"/>
+          <p:cNvPicPr>
+            <a:picLocks noChangeAspect="1"/>
+          </p:cNvPicPr>
+          <p:nvPr/>
+        </p:nvPicPr>
+        <p:blipFill>
+          <a:blip r:embed="rId8"/>
+          <a:stretch>
+            <a:fillRect/>
+          </a:stretch>
+        </p:blipFill>
+        <p:spPr>
+          <a:xfrm>
+            <a:off x="12454128" y="3200400"/>
+            <a:ext cx="512064" cy="512064"/>
+          </a:xfrm>
+          <a:prstGeom prst="rect">
+            <a:avLst/>
+          </a:prstGeom>
+        </p:spPr>
+      </p:pic>
+      <p:sp>
+        <p:nvSpPr>
+          <p:cNvPr id="55" name="TextBox 19"/>
+          <p:cNvSpPr txBox="1"/>
+          <p:nvPr/>
+        </p:nvSpPr>
+        <p:spPr>
+          <a:xfrm>
+            <a:off x="11338560" y="3739896"/>
+            <a:ext cx="2743200" cy="640080"/>
+          </a:xfrm>
+          <a:prstGeom prst="rect">
+            <a:avLst/>
+          </a:prstGeom>
+          <a:noFill/>
+        </p:spPr>
+        <p:txBody>
+          <a:bodyPr wrap="square" anchor="t" lIns="27432" rIns="27432" tIns="27432" bIns="27432">
+            <a:spAutoFit/>
+          </a:bodyPr>
+          <a:lstStyle/>
+          <a:p>
+            <a:pPr algn="ctr"/>
+            <a:r>
+              <a:rPr sz="1000" b="1">
+                <a:solidFill>
+                  <a:srgbClr val="232F3E"/>
+                </a:solidFill>
+                <a:latin typeface="Noto Sans JP"/>
+                <a:ea typeface="Noto Sans JP"/>
+              </a:rPr>
+              <a:t>S3 Tables alert_events</a:t>
+            </a:r>
+          </a:p>
+          <a:p>
+            <a:pPr algn="ctr"/>
+            <a:r>
+              <a:rPr sz="850" b="0">
+                <a:solidFill>
+                  <a:srgbClr val="5A6775"/>
+                </a:solidFill>
+                <a:latin typeface="Noto Sans JP"/>
+                <a:ea typeface="Noto Sans JP"/>
+              </a:rPr>
+              <a:t>（アラートの開いた・閉じた）</a:t>
+            </a:r>
+          </a:p>
+        </p:txBody>
+      </p:sp>
+      <p:cxnSp>
+        <p:nvCxnSpPr>
+          <p:cNvPr id="56" name="Connector 34"/>
+          <p:cNvCxnSpPr/>
+          <p:nvPr/>
+        </p:nvCxnSpPr>
+        <p:spPr>
+          <a:xfrm>
+            <a:off x="9738360" y="3456432"/>
+            <a:ext cx="2651760" cy="0"/>
           </a:xfrm>
           <a:prstGeom prst="line">
             <a:avLst/>
@@ -7996,14 +9207,14 @@
       </p:cxnSp>
       <p:cxnSp>
         <p:nvCxnSpPr>
-          <p:cNvPr id="36" name="Connector 35"/>
+          <p:cNvPr id="57" name="Connector 33"/>
           <p:cNvCxnSpPr/>
           <p:nvPr/>
         </p:nvCxnSpPr>
         <p:spPr>
-          <a:xfrm flipH="1">
-            <a:off x="9738360" y="2450592"/>
-            <a:ext cx="2651760" cy="0"/>
+          <a:xfrm flipV="1">
+            <a:off x="4526280" y="5413248"/>
+            <a:ext cx="1828800" cy="274320"/>
           </a:xfrm>
           <a:prstGeom prst="line">
             <a:avLst/>
@@ -8030,16 +9241,40 @@
           </a:fontRef>
         </p:style>
       </p:cxnSp>
-      <p:sp>
-        <p:nvSpPr>
-          <p:cNvPr id="37" name="TextBox 36"/>
+      <p:pic>
+        <p:nvPicPr>
+          <p:cNvPr id="58" name="Picture 57" descr="image.png"/>
+          <p:cNvPicPr>
+            <a:picLocks noChangeAspect="1"/>
+          </p:cNvPicPr>
+          <p:nvPr/>
+        </p:nvPicPr>
+        <p:blipFill>
+          <a:blip r:embed="rId8"/>
+          <a:stretch>
+            <a:fillRect/>
+          </a:stretch>
+        </p:blipFill>
+        <p:spPr>
+          <a:xfrm>
+            <a:off x="12454128" y="6583680"/>
+            <a:ext cx="512064" cy="512064"/>
+          </a:xfrm>
+          <a:prstGeom prst="rect">
+            <a:avLst/>
+          </a:prstGeom>
+        </p:spPr>
+      </p:pic>
+      <p:sp>
+        <p:nvSpPr>
+          <p:cNvPr id="59" name="TextBox 29"/>
           <p:cNvSpPr txBox="1"/>
           <p:nvPr/>
         </p:nvSpPr>
         <p:spPr>
           <a:xfrm>
-            <a:off x="10789920" y="2194560"/>
-            <a:ext cx="548640" cy="219456"/>
+            <a:off x="11338560" y="7123176"/>
+            <a:ext cx="2743200" cy="640080"/>
           </a:xfrm>
           <a:prstGeom prst="rect">
             <a:avLst/>
@@ -8054,28 +9289,54 @@
           <a:p>
             <a:pPr algn="ctr"/>
             <a:r>
-              <a:rPr sz="800" b="0">
+              <a:rPr sz="1000" b="1">
+                <a:solidFill>
+                  <a:srgbClr val="232F3E"/>
+                </a:solidFill>
+                <a:latin typeface="Noto Sans JP"/>
+                <a:ea typeface="Noto Sans JP"/>
+              </a:rPr>
+              <a:t>S3 Tables proposal_events</a:t>
+            </a:r>
+          </a:p>
+          <a:p>
+            <a:pPr algn="ctr"/>
+            <a:r>
+              <a:rPr sz="850" b="0">
                 <a:solidFill>
                   <a:srgbClr val="5A6775"/>
                 </a:solidFill>
                 <a:latin typeface="Noto Sans JP"/>
                 <a:ea typeface="Noto Sans JP"/>
               </a:rPr>
-              <a:t>承認</a:t>
+              <a:t>（修復案と承認・適用の経過）</a:t>
+            </a:r>
+          </a:p>
+          <a:p>
+            <a:pPr algn="ctr"/>
+            <a:r>
+              <a:rPr sz="850" b="0">
+                <a:solidFill>
+                  <a:srgbClr val="5A6775"/>
+                </a:solidFill>
+                <a:latin typeface="Noto Sans JP"/>
+                <a:ea typeface="Noto Sans JP"/>
+              </a:rPr>
+              <a:t>worker だけが書く</a:t>
             </a:r>
           </a:p>
         </p:txBody>
       </p:sp>
       <p:cxnSp>
         <p:nvCxnSpPr>
-          <p:cNvPr id="38" name="Connector 37"/>
+          <p:cNvPr id="60" name="Connector 43"/>
           <p:cNvCxnSpPr/>
           <p:nvPr/>
         </p:nvCxnSpPr>
         <p:spPr>
           <a:xfrm>
-            <a:off x="6995160" y="4919472"/>
-            <a:ext cx="2103120" cy="0"/>
+            <a:off x="9829800" y="6016752"/>
+            <a:ext cx="2560320" cy="768096"/>
           </a:xfrm>
           <a:prstGeom prst="line">
             <a:avLst/>
@@ -8104,14 +9365,14 @@
       </p:cxnSp>
       <p:sp>
         <p:nvSpPr>
-          <p:cNvPr id="39" name="TextBox 38"/>
+          <p:cNvPr id="61" name="TextBox 36"/>
           <p:cNvSpPr txBox="1"/>
           <p:nvPr/>
         </p:nvSpPr>
         <p:spPr>
           <a:xfrm>
-            <a:off x="7646670" y="4663440"/>
-            <a:ext cx="800100" cy="219456"/>
+            <a:off x="9921240" y="6601968"/>
+            <a:ext cx="1737360" cy="219456"/>
           </a:xfrm>
           <a:prstGeom prst="rect">
             <a:avLst/>
@@ -8133,309 +9394,7 @@
                 <a:latin typeface="Noto Sans JP"/>
                 <a:ea typeface="Noto Sans JP"/>
               </a:rPr>
-              <a:t>起動・解消</a:t>
-            </a:r>
-          </a:p>
-        </p:txBody>
-      </p:sp>
-      <p:cxnSp>
-        <p:nvCxnSpPr>
-          <p:cNvPr id="40" name="Connector 39"/>
-          <p:cNvCxnSpPr/>
-          <p:nvPr/>
-        </p:nvCxnSpPr>
-        <p:spPr>
-          <a:xfrm>
-            <a:off x="9738360" y="4919472"/>
-            <a:ext cx="2651760" cy="0"/>
-          </a:xfrm>
-          <a:prstGeom prst="line">
-            <a:avLst/>
-          </a:prstGeom>
-          <a:ln w="19050">
-            <a:solidFill>
-              <a:srgbClr val="6B7785"/>
-            </a:solidFill>
-            <a:tailEnd type="triangle" w="med" len="med"/>
-          </a:ln>
-        </p:spPr>
-        <p:style>
-          <a:lnRef idx="2">
-            <a:schemeClr val="accent1"/>
-          </a:lnRef>
-          <a:fillRef idx="0">
-            <a:schemeClr val="accent1"/>
-          </a:fillRef>
-          <a:effectRef idx="1">
-            <a:schemeClr val="accent1"/>
-          </a:effectRef>
-          <a:fontRef idx="minor">
-            <a:schemeClr val="tx1"/>
-          </a:fontRef>
-        </p:style>
-      </p:cxnSp>
-      <p:sp>
-        <p:nvSpPr>
-          <p:cNvPr id="41" name="TextBox 40"/>
-          <p:cNvSpPr txBox="1"/>
-          <p:nvPr/>
-        </p:nvSpPr>
-        <p:spPr>
-          <a:xfrm>
-            <a:off x="10417302" y="4663440"/>
-            <a:ext cx="1293876" cy="219456"/>
-          </a:xfrm>
-          <a:prstGeom prst="rect">
-            <a:avLst/>
-          </a:prstGeom>
-          <a:noFill/>
-        </p:spPr>
-        <p:txBody>
-          <a:bodyPr wrap="square" anchor="t" lIns="27432" rIns="27432" tIns="27432" bIns="27432">
-            <a:spAutoFit/>
-          </a:bodyPr>
-          <a:lstStyle/>
-          <a:p>
-            <a:pPr algn="ctr"/>
-            <a:r>
-              <a:rPr sz="800" b="0">
-                <a:solidFill>
-                  <a:srgbClr val="5A6775"/>
-                </a:solidFill>
-                <a:latin typeface="Noto Sans JP"/>
-                <a:ea typeface="Noto Sans JP"/>
-              </a:rPr>
-              <a:t>原因と修復案を聞く</a:t>
-            </a:r>
-          </a:p>
-        </p:txBody>
-      </p:sp>
-      <p:cxnSp>
-        <p:nvCxnSpPr>
-          <p:cNvPr id="42" name="Connector 41"/>
-          <p:cNvCxnSpPr/>
-          <p:nvPr/>
-        </p:nvCxnSpPr>
-        <p:spPr>
-          <a:xfrm flipV="1">
-            <a:off x="9418320" y="3154680"/>
-            <a:ext cx="0" cy="1463040"/>
-          </a:xfrm>
-          <a:prstGeom prst="line">
-            <a:avLst/>
-          </a:prstGeom>
-          <a:ln w="19050">
-            <a:solidFill>
-              <a:srgbClr val="6B7785"/>
-            </a:solidFill>
-            <a:headEnd type="triangle" w="med" len="med"/>
-            <a:tailEnd type="triangle" w="med" len="med"/>
-          </a:ln>
-        </p:spPr>
-        <p:style>
-          <a:lnRef idx="2">
-            <a:schemeClr val="accent1"/>
-          </a:lnRef>
-          <a:fillRef idx="0">
-            <a:schemeClr val="accent1"/>
-          </a:fillRef>
-          <a:effectRef idx="1">
-            <a:schemeClr val="accent1"/>
-          </a:effectRef>
-          <a:fontRef idx="minor">
-            <a:schemeClr val="tx1"/>
-          </a:fontRef>
-        </p:style>
-      </p:cxnSp>
-      <p:sp>
-        <p:nvSpPr>
-          <p:cNvPr id="43" name="TextBox 42"/>
-          <p:cNvSpPr txBox="1"/>
-          <p:nvPr/>
-        </p:nvSpPr>
-        <p:spPr>
-          <a:xfrm>
-            <a:off x="9491472" y="4069080"/>
-            <a:ext cx="640080" cy="219456"/>
-          </a:xfrm>
-          <a:prstGeom prst="rect">
-            <a:avLst/>
-          </a:prstGeom>
-          <a:noFill/>
-        </p:spPr>
-        <p:txBody>
-          <a:bodyPr wrap="square" anchor="t" lIns="27432" rIns="27432" tIns="27432" bIns="27432">
-            <a:spAutoFit/>
-          </a:bodyPr>
-          <a:lstStyle/>
-          <a:p>
-            <a:pPr algn="ctr"/>
-            <a:r>
-              <a:rPr sz="800" b="0">
-                <a:solidFill>
-                  <a:srgbClr val="5A6775"/>
-                </a:solidFill>
-                <a:latin typeface="Noto Sans JP"/>
-                <a:ea typeface="Noto Sans JP"/>
-              </a:rPr>
-              <a:t>修復案</a:t>
-            </a:r>
-          </a:p>
-        </p:txBody>
-      </p:sp>
-      <p:cxnSp>
-        <p:nvCxnSpPr>
-          <p:cNvPr id="44" name="Connector 43"/>
-          <p:cNvCxnSpPr/>
-          <p:nvPr/>
-        </p:nvCxnSpPr>
-        <p:spPr>
-          <a:xfrm>
-            <a:off x="9418320" y="5760720"/>
-            <a:ext cx="0" cy="777240"/>
-          </a:xfrm>
-          <a:prstGeom prst="line">
-            <a:avLst/>
-          </a:prstGeom>
-          <a:ln w="19050">
-            <a:solidFill>
-              <a:srgbClr val="6B7785"/>
-            </a:solidFill>
-            <a:tailEnd type="triangle" w="med" len="med"/>
-          </a:ln>
-        </p:spPr>
-        <p:style>
-          <a:lnRef idx="2">
-            <a:schemeClr val="accent1"/>
-          </a:lnRef>
-          <a:fillRef idx="0">
-            <a:schemeClr val="accent1"/>
-          </a:fillRef>
-          <a:effectRef idx="1">
-            <a:schemeClr val="accent1"/>
-          </a:effectRef>
-          <a:fontRef idx="minor">
-            <a:schemeClr val="tx1"/>
-          </a:fontRef>
-        </p:style>
-      </p:cxnSp>
-      <p:sp>
-        <p:nvSpPr>
-          <p:cNvPr id="45" name="TextBox 44"/>
-          <p:cNvSpPr txBox="1"/>
-          <p:nvPr/>
-        </p:nvSpPr>
-        <p:spPr>
-          <a:xfrm>
-            <a:off x="9509760" y="6053328"/>
-            <a:ext cx="2377440" cy="219456"/>
-          </a:xfrm>
-          <a:prstGeom prst="rect">
-            <a:avLst/>
-          </a:prstGeom>
-          <a:noFill/>
-        </p:spPr>
-        <p:txBody>
-          <a:bodyPr wrap="square" anchor="t" lIns="27432" rIns="27432" tIns="27432" bIns="27432">
-            <a:spAutoFit/>
-          </a:bodyPr>
-          <a:lstStyle/>
-          <a:p>
-            <a:pPr algn="ctr"/>
-            <a:r>
-              <a:rPr sz="800" b="0">
-                <a:solidFill>
-                  <a:srgbClr val="5A6775"/>
-                </a:solidFill>
-                <a:latin typeface="Noto Sans JP"/>
-                <a:ea typeface="Noto Sans JP"/>
-              </a:rPr>
-              <a:t>承認されたら SSM Run Command</a:t>
-            </a:r>
-          </a:p>
-        </p:txBody>
-      </p:sp>
-      <p:sp>
-        <p:nvSpPr>
-          <p:cNvPr id="46" name="TextBox 45"/>
-          <p:cNvSpPr txBox="1"/>
-          <p:nvPr/>
-        </p:nvSpPr>
-        <p:spPr>
-          <a:xfrm>
-            <a:off x="5715000" y="6903720"/>
-            <a:ext cx="3108960" cy="640080"/>
-          </a:xfrm>
-          <a:prstGeom prst="rect">
-            <a:avLst/>
-          </a:prstGeom>
-          <a:noFill/>
-        </p:spPr>
-        <p:txBody>
-          <a:bodyPr wrap="square" anchor="t" lIns="27432" rIns="27432" tIns="27432" bIns="27432">
-            <a:spAutoFit/>
-          </a:bodyPr>
-          <a:lstStyle/>
-          <a:p>
-            <a:pPr algn="l"/>
-            <a:r>
-              <a:rPr sz="900" b="0">
-                <a:solidFill>
-                  <a:srgbClr val="5A6775"/>
-                </a:solidFill>
-                <a:latin typeface="Noto Sans JP"/>
-                <a:ea typeface="Noto Sans JP"/>
-              </a:rPr>
-              <a:t>作成・承認・却下・適用・確認の</a:t>
-            </a:r>
-          </a:p>
-          <a:p>
-            <a:pPr algn="l"/>
-            <a:r>
-              <a:rPr sz="900" b="0">
-                <a:solidFill>
-                  <a:srgbClr val="5A6775"/>
-                </a:solidFill>
-                <a:latin typeface="Noto Sans JP"/>
-                <a:ea typeface="Noto Sans JP"/>
-              </a:rPr>
-              <a:t>履歴は S3 Tables（証跡）に残す</a:t>
-            </a:r>
-          </a:p>
-        </p:txBody>
-      </p:sp>
-      <p:sp>
-        <p:nvSpPr>
-          <p:cNvPr id="47" name="TextBox 46"/>
-          <p:cNvSpPr txBox="1"/>
-          <p:nvPr/>
-        </p:nvSpPr>
-        <p:spPr>
-          <a:xfrm>
-            <a:off x="13258800" y="7818120"/>
-            <a:ext cx="914400" cy="228600"/>
-          </a:xfrm>
-          <a:prstGeom prst="rect">
-            <a:avLst/>
-          </a:prstGeom>
-          <a:noFill/>
-        </p:spPr>
-        <p:txBody>
-          <a:bodyPr wrap="square" anchor="t" lIns="27432" rIns="27432" tIns="27432" bIns="27432">
-            <a:spAutoFit/>
-          </a:bodyPr>
-          <a:lstStyle/>
-          <a:p>
-            <a:pPr algn="r"/>
-            <a:r>
-              <a:rPr sz="850" b="0">
-                <a:solidFill>
-                  <a:srgbClr val="5A6775"/>
-                </a:solidFill>
-                <a:latin typeface="Noto Sans JP"/>
-                <a:ea typeface="Noto Sans JP"/>
-              </a:rPr>
-              <a:t>3 / 5</a:t>
+              <a:t>修復案と経過を 1 行ずつ足す</a:t>
             </a:r>
           </a:p>
         </p:txBody>
@@ -9381,7 +10340,7 @@
                 <a:latin typeface="Noto Sans JP"/>
                 <a:ea typeface="Noto Sans JP"/>
               </a:rPr>
-              <a:t>Amazon Neptune</a:t>
+              <a:t>Amazon Neptune Analytics</a:t>
             </a:r>
           </a:p>
           <a:p>
@@ -9407,7 +10366,7 @@
                 <a:latin typeface="Noto Sans JP"/>
                 <a:ea typeface="Noto Sans JP"/>
               </a:rPr>
-              <a:t>Gremlin で差分だけ書く</a:t>
+              <a:t>openCypher で差分だけ書く</a:t>
             </a:r>
           </a:p>
         </p:txBody>
@@ -10247,7 +11206,7 @@
                 <a:latin typeface="Noto Sans JP"/>
                 <a:ea typeface="Noto Sans JP"/>
               </a:rPr>
-              <a:t>全部がプライベートサブネットの中。PoC は EC2・ECS のタスク・NLB をサブネット a に 1 つずつ置く（冗長にしていない）。</a:t>
+              <a:t>全部がプライベートサブネットの中。既定は 1 AZ（サブネット a）に 1 つずつ置く（MSK だけ 2 AZ）。「1〜3 AZ」は &lt;リソース&gt;_AZ_NUM で広げられる範囲（2 AZ 以上は AWS で未確認）。</a:t>
             </a:r>
           </a:p>
         </p:txBody>
@@ -10402,7 +11361,7 @@
                 <a:latin typeface="Noto Sans JP"/>
                 <a:ea typeface="Noto Sans JP"/>
               </a:rPr>
-              <a:t>Nautobot 8081</a:t>
+              <a:t>Nautobot 8081 / Kafbat UI 8082</a:t>
             </a:r>
           </a:p>
         </p:txBody>
@@ -10484,7 +11443,7 @@
                 <a:latin typeface="Noto Sans JP"/>
                 <a:ea typeface="Noto Sans JP"/>
               </a:rPr>
-              <a:t>VPC（プライベートサブネットだけ。IGW・NAT Gateway 無し）</a:t>
+              <a:t>VPC（プライベートサブネット a / b / c だけ。IGW・NAT Gateway 無し）</a:t>
             </a:r>
           </a:p>
         </p:txBody>
@@ -10641,7 +11600,7 @@
                 <a:latin typeface="Noto Sans JP"/>
                 <a:ea typeface="Noto Sans JP"/>
               </a:rPr>
-              <a:t>Gradio・踏み台</a:t>
+              <a:t>Gradio・踏み台（いつも 1 台）</a:t>
             </a:r>
           </a:p>
         </p:txBody>
@@ -10714,7 +11673,7 @@
                 <a:latin typeface="Noto Sans JP"/>
                 <a:ea typeface="Noto Sans JP"/>
               </a:rPr>
-              <a:t>containerlab</a:t>
+              <a:t>containerlab（いつも 1 台）</a:t>
             </a:r>
           </a:p>
         </p:txBody>
@@ -10819,7 +11778,7 @@
         </p:blipFill>
         <p:spPr>
           <a:xfrm>
-            <a:off x="5577840" y="2560320"/>
+            <a:off x="5577840" y="2542032"/>
             <a:ext cx="384048" cy="384048"/>
           </a:xfrm>
           <a:prstGeom prst="rect">
@@ -10835,8 +11794,8 @@
         </p:nvSpPr>
         <p:spPr>
           <a:xfrm>
-            <a:off x="6035040" y="2532888"/>
-            <a:ext cx="1737360" cy="457200"/>
+            <a:off x="6035040" y="2514600"/>
+            <a:ext cx="1874520" cy="457200"/>
           </a:xfrm>
           <a:prstGeom prst="rect">
             <a:avLst/>
@@ -10871,7 +11830,7 @@
                 <a:latin typeface="Noto Sans JP"/>
                 <a:ea typeface="Noto Sans JP"/>
               </a:rPr>
-              <a:t>stream</a:t>
+              <a:t>stream（1〜3 AZ）</a:t>
             </a:r>
           </a:p>
         </p:txBody>
@@ -10892,7 +11851,7 @@
         </p:blipFill>
         <p:spPr>
           <a:xfrm>
-            <a:off x="7818120" y="2560320"/>
+            <a:off x="7818120" y="2542032"/>
             <a:ext cx="384048" cy="384048"/>
           </a:xfrm>
           <a:prstGeom prst="rect">
@@ -10908,8 +11867,8 @@
         </p:nvSpPr>
         <p:spPr>
           <a:xfrm>
-            <a:off x="8275320" y="2532888"/>
-            <a:ext cx="1737360" cy="457200"/>
+            <a:off x="8275320" y="2514600"/>
+            <a:ext cx="1874520" cy="457200"/>
           </a:xfrm>
           <a:prstGeom prst="rect">
             <a:avLst/>
@@ -10944,7 +11903,7 @@
                 <a:latin typeface="Noto Sans JP"/>
                 <a:ea typeface="Noto Sans JP"/>
               </a:rPr>
-              <a:t>stream</a:t>
+              <a:t>stream（いつも 1 つ）</a:t>
             </a:r>
           </a:p>
         </p:txBody>
@@ -10965,7 +11924,7 @@
         </p:blipFill>
         <p:spPr>
           <a:xfrm>
-            <a:off x="5577840" y="3474720"/>
+            <a:off x="7818120" y="3246120"/>
             <a:ext cx="384048" cy="384048"/>
           </a:xfrm>
           <a:prstGeom prst="rect">
@@ -10981,8 +11940,8 @@
         </p:nvSpPr>
         <p:spPr>
           <a:xfrm>
-            <a:off x="6035040" y="3447288"/>
-            <a:ext cx="1737360" cy="457200"/>
+            <a:off x="8275320" y="3218688"/>
+            <a:ext cx="1874520" cy="457200"/>
           </a:xfrm>
           <a:prstGeom prst="rect">
             <a:avLst/>
@@ -11017,7 +11976,7 @@
                 <a:latin typeface="Noto Sans JP"/>
                 <a:ea typeface="Noto Sans JP"/>
               </a:rPr>
-              <a:t>analytics</a:t>
+              <a:t>analytics（いつも 1 つ）</a:t>
             </a:r>
           </a:p>
         </p:txBody>
@@ -11038,7 +11997,7 @@
         </p:blipFill>
         <p:spPr>
           <a:xfrm>
-            <a:off x="7818120" y="3474720"/>
+            <a:off x="5577840" y="3950208"/>
             <a:ext cx="384048" cy="384048"/>
           </a:xfrm>
           <a:prstGeom prst="rect">
@@ -11054,8 +12013,8 @@
         </p:nvSpPr>
         <p:spPr>
           <a:xfrm>
-            <a:off x="8275320" y="3447288"/>
-            <a:ext cx="1737360" cy="457200"/>
+            <a:off x="6035040" y="3922776"/>
+            <a:ext cx="1874520" cy="457200"/>
           </a:xfrm>
           <a:prstGeom prst="rect">
             <a:avLst/>
@@ -11090,7 +12049,7 @@
                 <a:latin typeface="Noto Sans JP"/>
                 <a:ea typeface="Noto Sans JP"/>
               </a:rPr>
-              <a:t>analytics</a:t>
+              <a:t>analytics（1〜3 AZ）</a:t>
             </a:r>
           </a:p>
         </p:txBody>
@@ -11111,7 +12070,7 @@
         </p:blipFill>
         <p:spPr>
           <a:xfrm>
-            <a:off x="5577840" y="4389120"/>
+            <a:off x="7818120" y="3950208"/>
             <a:ext cx="384048" cy="384048"/>
           </a:xfrm>
           <a:prstGeom prst="rect">
@@ -11127,8 +12086,8 @@
         </p:nvSpPr>
         <p:spPr>
           <a:xfrm>
-            <a:off x="6035040" y="4361688"/>
-            <a:ext cx="1737360" cy="457200"/>
+            <a:off x="8275320" y="3922776"/>
+            <a:ext cx="1874520" cy="457200"/>
           </a:xfrm>
           <a:prstGeom prst="rect">
             <a:avLst/>
@@ -11163,7 +12122,7 @@
                 <a:latin typeface="Noto Sans JP"/>
                 <a:ea typeface="Noto Sans JP"/>
               </a:rPr>
-              <a:t>workflow</a:t>
+              <a:t>workflow（いつも 1 つ）</a:t>
             </a:r>
           </a:p>
         </p:txBody>
@@ -11184,7 +12143,7 @@
         </p:blipFill>
         <p:spPr>
           <a:xfrm>
-            <a:off x="7818120" y="4389120"/>
+            <a:off x="5577840" y="4654296"/>
             <a:ext cx="384048" cy="384048"/>
           </a:xfrm>
           <a:prstGeom prst="rect">
@@ -11200,8 +12159,8 @@
         </p:nvSpPr>
         <p:spPr>
           <a:xfrm>
-            <a:off x="8275320" y="4361688"/>
-            <a:ext cx="1737360" cy="457200"/>
+            <a:off x="6035040" y="4626864"/>
+            <a:ext cx="1874520" cy="457200"/>
           </a:xfrm>
           <a:prstGeom prst="rect">
             <a:avLst/>
@@ -11236,7 +12195,7 @@
                 <a:latin typeface="Noto Sans JP"/>
                 <a:ea typeface="Noto Sans JP"/>
               </a:rPr>
-              <a:t>nautobot</a:t>
+              <a:t>nautobot（いつも 1 つ）</a:t>
             </a:r>
           </a:p>
         </p:txBody>
@@ -11341,7 +12300,7 @@
         </p:blipFill>
         <p:spPr>
           <a:xfrm>
-            <a:off x="3063240" y="6035040"/>
+            <a:off x="3063240" y="5943600"/>
             <a:ext cx="384048" cy="384048"/>
           </a:xfrm>
           <a:prstGeom prst="rect">
@@ -11349,102 +12308,6 @@
           </a:prstGeom>
         </p:spPr>
       </p:pic>
-      <p:sp>
-        <p:nvSpPr>
-          <p:cNvPr id="32" name="TextBox 31"/>
-          <p:cNvSpPr txBox="1"/>
-          <p:nvPr/>
-        </p:nvSpPr>
-        <p:spPr>
-          <a:xfrm>
-            <a:off x="3502152" y="6099048"/>
-            <a:ext cx="1188720" cy="274320"/>
-          </a:xfrm>
-          <a:prstGeom prst="rect">
-            <a:avLst/>
-          </a:prstGeom>
-          <a:noFill/>
-        </p:spPr>
-        <p:txBody>
-          <a:bodyPr wrap="square" anchor="t" lIns="27432" rIns="27432" tIns="27432" bIns="27432">
-            <a:spAutoFit/>
-          </a:bodyPr>
-          <a:lstStyle/>
-          <a:p>
-            <a:pPr algn="l"/>
-            <a:r>
-              <a:rPr sz="1000" b="1">
-                <a:solidFill>
-                  <a:srgbClr val="232F3E"/>
-                </a:solidFill>
-                <a:latin typeface="Noto Sans JP"/>
-                <a:ea typeface="Noto Sans JP"/>
-              </a:rPr>
-              <a:t>MSK</a:t>
-            </a:r>
-          </a:p>
-        </p:txBody>
-      </p:sp>
-      <p:pic>
-        <p:nvPicPr>
-          <p:cNvPr id="33" name="Picture 32" descr="3e5bdaec.png"/>
-          <p:cNvPicPr>
-            <a:picLocks noChangeAspect="1"/>
-          </p:cNvPicPr>
-          <p:nvPr/>
-        </p:nvPicPr>
-        <p:blipFill>
-          <a:blip r:embed="rId6"/>
-          <a:stretch>
-            <a:fillRect/>
-          </a:stretch>
-        </p:blipFill>
-        <p:spPr>
-          <a:xfrm>
-            <a:off x="4663440" y="6035040"/>
-            <a:ext cx="384048" cy="384048"/>
-          </a:xfrm>
-          <a:prstGeom prst="rect">
-            <a:avLst/>
-          </a:prstGeom>
-        </p:spPr>
-      </p:pic>
-      <p:sp>
-        <p:nvSpPr>
-          <p:cNvPr id="34" name="TextBox 33"/>
-          <p:cNvSpPr txBox="1"/>
-          <p:nvPr/>
-        </p:nvSpPr>
-        <p:spPr>
-          <a:xfrm>
-            <a:off x="5102352" y="6099048"/>
-            <a:ext cx="1188720" cy="274320"/>
-          </a:xfrm>
-          <a:prstGeom prst="rect">
-            <a:avLst/>
-          </a:prstGeom>
-          <a:noFill/>
-        </p:spPr>
-        <p:txBody>
-          <a:bodyPr wrap="square" anchor="t" lIns="27432" rIns="27432" tIns="27432" bIns="27432">
-            <a:spAutoFit/>
-          </a:bodyPr>
-          <a:lstStyle/>
-          <a:p>
-            <a:pPr algn="l"/>
-            <a:r>
-              <a:rPr sz="1000" b="1">
-                <a:solidFill>
-                  <a:srgbClr val="232F3E"/>
-                </a:solidFill>
-                <a:latin typeface="Noto Sans JP"/>
-                <a:ea typeface="Noto Sans JP"/>
-              </a:rPr>
-              <a:t>Neptune</a:t>
-            </a:r>
-          </a:p>
-        </p:txBody>
-      </p:sp>
       <p:sp>
         <p:nvSpPr>
           <p:cNvPr id="35" name="Rounded Rectangle 34"/>
@@ -11453,7 +12316,7 @@
         </p:nvSpPr>
         <p:spPr>
           <a:xfrm>
-            <a:off x="6263640" y="6035040"/>
+            <a:off x="4663440" y="5943600"/>
             <a:ext cx="384048" cy="384048"/>
           </a:xfrm>
           <a:prstGeom prst="roundRect">
@@ -11501,7 +12364,7 @@
         </p:nvSpPr>
         <p:spPr>
           <a:xfrm>
-            <a:off x="6217920" y="6035040"/>
+            <a:off x="4617720" y="5943600"/>
             <a:ext cx="475488" cy="384048"/>
           </a:xfrm>
           <a:prstGeom prst="rect">
@@ -11520,42 +12383,6 @@
               <a:rPr sz="700" b="1">
                 <a:solidFill>
                   <a:srgbClr val="FFFFFF"/>
-                </a:solidFill>
-                <a:latin typeface="Noto Sans JP"/>
-                <a:ea typeface="Noto Sans JP"/>
-              </a:rPr>
-              <a:t>RDS</a:t>
-            </a:r>
-          </a:p>
-        </p:txBody>
-      </p:sp>
-      <p:sp>
-        <p:nvSpPr>
-          <p:cNvPr id="37" name="TextBox 36"/>
-          <p:cNvSpPr txBox="1"/>
-          <p:nvPr/>
-        </p:nvSpPr>
-        <p:spPr>
-          <a:xfrm>
-            <a:off x="6702552" y="6099048"/>
-            <a:ext cx="1188720" cy="274320"/>
-          </a:xfrm>
-          <a:prstGeom prst="rect">
-            <a:avLst/>
-          </a:prstGeom>
-          <a:noFill/>
-        </p:spPr>
-        <p:txBody>
-          <a:bodyPr wrap="square" anchor="t" lIns="27432" rIns="27432" tIns="27432" bIns="27432">
-            <a:spAutoFit/>
-          </a:bodyPr>
-          <a:lstStyle/>
-          <a:p>
-            <a:pPr algn="l"/>
-            <a:r>
-              <a:rPr sz="1000" b="1">
-                <a:solidFill>
-                  <a:srgbClr val="232F3E"/>
                 </a:solidFill>
                 <a:latin typeface="Noto Sans JP"/>
                 <a:ea typeface="Noto Sans JP"/>
@@ -11581,7 +12408,7 @@
         </p:blipFill>
         <p:spPr>
           <a:xfrm>
-            <a:off x="3063240" y="6693407"/>
+            <a:off x="6263640" y="5943600"/>
             <a:ext cx="384048" cy="384048"/>
           </a:xfrm>
           <a:prstGeom prst="rect">
@@ -11589,42 +12416,6 @@
           </a:prstGeom>
         </p:spPr>
       </p:pic>
-      <p:sp>
-        <p:nvSpPr>
-          <p:cNvPr id="39" name="TextBox 38"/>
-          <p:cNvSpPr txBox="1"/>
-          <p:nvPr/>
-        </p:nvSpPr>
-        <p:spPr>
-          <a:xfrm>
-            <a:off x="3502152" y="6757416"/>
-            <a:ext cx="1188720" cy="274320"/>
-          </a:xfrm>
-          <a:prstGeom prst="rect">
-            <a:avLst/>
-          </a:prstGeom>
-          <a:noFill/>
-        </p:spPr>
-        <p:txBody>
-          <a:bodyPr wrap="square" anchor="t" lIns="27432" rIns="27432" tIns="27432" bIns="27432">
-            <a:spAutoFit/>
-          </a:bodyPr>
-          <a:lstStyle/>
-          <a:p>
-            <a:pPr algn="l"/>
-            <a:r>
-              <a:rPr sz="1000" b="1">
-                <a:solidFill>
-                  <a:srgbClr val="232F3E"/>
-                </a:solidFill>
-                <a:latin typeface="Noto Sans JP"/>
-                <a:ea typeface="Noto Sans JP"/>
-              </a:rPr>
-              <a:t>EMR Serverless</a:t>
-            </a:r>
-          </a:p>
-        </p:txBody>
-      </p:sp>
       <p:pic>
         <p:nvPicPr>
           <p:cNvPr id="40" name="Picture 39" descr="c4524d41.png"/>
@@ -11641,7 +12432,7 @@
         </p:blipFill>
         <p:spPr>
           <a:xfrm>
-            <a:off x="4663440" y="6693407"/>
+            <a:off x="3063240" y="6675120"/>
             <a:ext cx="384048" cy="384048"/>
           </a:xfrm>
           <a:prstGeom prst="rect">
@@ -11649,42 +12440,6 @@
           </a:prstGeom>
         </p:spPr>
       </p:pic>
-      <p:sp>
-        <p:nvSpPr>
-          <p:cNvPr id="41" name="TextBox 40"/>
-          <p:cNvSpPr txBox="1"/>
-          <p:nvPr/>
-        </p:nvSpPr>
-        <p:spPr>
-          <a:xfrm>
-            <a:off x="5102352" y="6757416"/>
-            <a:ext cx="1188720" cy="274320"/>
-          </a:xfrm>
-          <a:prstGeom prst="rect">
-            <a:avLst/>
-          </a:prstGeom>
-          <a:noFill/>
-        </p:spPr>
-        <p:txBody>
-          <a:bodyPr wrap="square" anchor="t" lIns="27432" rIns="27432" tIns="27432" bIns="27432">
-            <a:spAutoFit/>
-          </a:bodyPr>
-          <a:lstStyle/>
-          <a:p>
-            <a:pPr algn="l"/>
-            <a:r>
-              <a:rPr sz="1000" b="1">
-                <a:solidFill>
-                  <a:srgbClr val="232F3E"/>
-                </a:solidFill>
-                <a:latin typeface="Noto Sans JP"/>
-                <a:ea typeface="Noto Sans JP"/>
-              </a:rPr>
-              <a:t>Lambda</a:t>
-            </a:r>
-          </a:p>
-        </p:txBody>
-      </p:sp>
       <p:pic>
         <p:nvPicPr>
           <p:cNvPr id="42" name="Picture 41" descr="7bcba283.png"/>
@@ -11701,7 +12456,7 @@
         </p:blipFill>
         <p:spPr>
           <a:xfrm>
-            <a:off x="6263640" y="6693407"/>
+            <a:off x="4663440" y="6675120"/>
             <a:ext cx="384048" cy="384048"/>
           </a:xfrm>
           <a:prstGeom prst="rect">
@@ -11709,42 +12464,6 @@
           </a:prstGeom>
         </p:spPr>
       </p:pic>
-      <p:sp>
-        <p:nvSpPr>
-          <p:cNvPr id="43" name="TextBox 42"/>
-          <p:cNvSpPr txBox="1"/>
-          <p:nvPr/>
-        </p:nvSpPr>
-        <p:spPr>
-          <a:xfrm>
-            <a:off x="6702552" y="6757416"/>
-            <a:ext cx="1188720" cy="274320"/>
-          </a:xfrm>
-          <a:prstGeom prst="rect">
-            <a:avLst/>
-          </a:prstGeom>
-          <a:noFill/>
-        </p:spPr>
-        <p:txBody>
-          <a:bodyPr wrap="square" anchor="t" lIns="27432" rIns="27432" tIns="27432" bIns="27432">
-            <a:spAutoFit/>
-          </a:bodyPr>
-          <a:lstStyle/>
-          <a:p>
-            <a:pPr algn="l"/>
-            <a:r>
-              <a:rPr sz="1000" b="1">
-                <a:solidFill>
-                  <a:srgbClr val="232F3E"/>
-                </a:solidFill>
-                <a:latin typeface="Noto Sans JP"/>
-                <a:ea typeface="Noto Sans JP"/>
-              </a:rPr>
-              <a:t>内部 NLB</a:t>
-            </a:r>
-          </a:p>
-        </p:txBody>
-      </p:sp>
       <p:sp>
         <p:nvSpPr>
           <p:cNvPr id="44" name="Rounded Rectangle 43"/>
@@ -11874,7 +12593,7 @@
                 <a:latin typeface="Noto Sans JP"/>
                 <a:ea typeface="Noto Sans JP"/>
               </a:rPr>
-              <a:t>ここからだけ</a:t>
+              <a:t>ここからだけ（1〜3 AZ）</a:t>
             </a:r>
           </a:p>
         </p:txBody>
@@ -12065,7 +12784,7 @@
         </p:blipFill>
         <p:spPr>
           <a:xfrm>
-            <a:off x="11109960" y="2103120"/>
+            <a:off x="11109960" y="2057400"/>
             <a:ext cx="384048" cy="384048"/>
           </a:xfrm>
           <a:prstGeom prst="rect">
@@ -12081,7 +12800,7 @@
         </p:nvSpPr>
         <p:spPr>
           <a:xfrm>
-            <a:off x="11612880" y="2167127"/>
+            <a:off x="11612880" y="2121408"/>
             <a:ext cx="2468880" cy="274320"/>
           </a:xfrm>
           <a:prstGeom prst="rect">
@@ -12104,7 +12823,7 @@
                 <a:latin typeface="Noto Sans JP"/>
                 <a:ea typeface="Noto Sans JP"/>
               </a:rPr>
-              <a:t>S3 Tables・S3</a:t>
+              <a:t>S3 Tables・S3・Athena</a:t>
             </a:r>
           </a:p>
         </p:txBody>
@@ -12125,7 +12844,7 @@
         </p:blipFill>
         <p:spPr>
           <a:xfrm>
-            <a:off x="11109960" y="2651760"/>
+            <a:off x="11109960" y="2514600"/>
             <a:ext cx="384048" cy="384048"/>
           </a:xfrm>
           <a:prstGeom prst="rect">
@@ -12141,7 +12860,7 @@
         </p:nvSpPr>
         <p:spPr>
           <a:xfrm>
-            <a:off x="11612880" y="2715768"/>
+            <a:off x="11612880" y="2578608"/>
             <a:ext cx="2468880" cy="274320"/>
           </a:xfrm>
           <a:prstGeom prst="rect">
@@ -12164,7 +12883,7 @@
                 <a:latin typeface="Noto Sans JP"/>
                 <a:ea typeface="Noto Sans JP"/>
               </a:rPr>
-              <a:t>OpenSearch Serverless</a:t>
+              <a:t>OpenSearch Serverless（1〜2 AZ）</a:t>
             </a:r>
           </a:p>
         </p:txBody>
@@ -12185,7 +12904,7 @@
         </p:blipFill>
         <p:spPr>
           <a:xfrm>
-            <a:off x="11109960" y="3200400"/>
+            <a:off x="11109960" y="2971800"/>
             <a:ext cx="384048" cy="384048"/>
           </a:xfrm>
           <a:prstGeom prst="rect">
@@ -12201,7 +12920,7 @@
         </p:nvSpPr>
         <p:spPr>
           <a:xfrm>
-            <a:off x="11612880" y="3264408"/>
+            <a:off x="11612880" y="3035808"/>
             <a:ext cx="2468880" cy="274320"/>
           </a:xfrm>
           <a:prstGeom prst="rect">
@@ -12224,7 +12943,7 @@
                 <a:latin typeface="Noto Sans JP"/>
                 <a:ea typeface="Noto Sans JP"/>
               </a:rPr>
-              <a:t>Managed Prometheus</a:t>
+              <a:t>Managed Service for Prometheus</a:t>
             </a:r>
           </a:p>
         </p:txBody>
@@ -12245,7 +12964,7 @@
         </p:blipFill>
         <p:spPr>
           <a:xfrm>
-            <a:off x="11109960" y="3749039"/>
+            <a:off x="11109960" y="3886200"/>
             <a:ext cx="384048" cy="384048"/>
           </a:xfrm>
           <a:prstGeom prst="rect">
@@ -12261,7 +12980,7 @@
         </p:nvSpPr>
         <p:spPr>
           <a:xfrm>
-            <a:off x="11612880" y="3813048"/>
+            <a:off x="11612880" y="3950208"/>
             <a:ext cx="2468880" cy="274320"/>
           </a:xfrm>
           <a:prstGeom prst="rect">
@@ -12297,7 +13016,7 @@
         </p:nvSpPr>
         <p:spPr>
           <a:xfrm>
-            <a:off x="11109960" y="4297679"/>
+            <a:off x="11109960" y="4343400"/>
             <a:ext cx="384048" cy="384048"/>
           </a:xfrm>
           <a:prstGeom prst="roundRect">
@@ -12345,7 +13064,7 @@
         </p:nvSpPr>
         <p:spPr>
           <a:xfrm>
-            <a:off x="11064240" y="4297679"/>
+            <a:off x="11064240" y="4343400"/>
             <a:ext cx="475488" cy="384048"/>
           </a:xfrm>
           <a:prstGeom prst="rect">
@@ -12381,7 +13100,7 @@
         </p:nvSpPr>
         <p:spPr>
           <a:xfrm>
-            <a:off x="11612880" y="4361688"/>
+            <a:off x="11612880" y="4407408"/>
             <a:ext cx="2468880" cy="274320"/>
           </a:xfrm>
           <a:prstGeom prst="rect">
@@ -12425,7 +13144,7 @@
         </p:blipFill>
         <p:spPr>
           <a:xfrm>
-            <a:off x="11109960" y="4846320"/>
+            <a:off x="11109960" y="4800600"/>
             <a:ext cx="384048" cy="384048"/>
           </a:xfrm>
           <a:prstGeom prst="rect">
@@ -12441,7 +13160,7 @@
         </p:nvSpPr>
         <p:spPr>
           <a:xfrm>
-            <a:off x="11612880" y="4910328"/>
+            <a:off x="11612880" y="4864608"/>
             <a:ext cx="2468880" cy="274320"/>
           </a:xfrm>
           <a:prstGeom prst="rect">
@@ -12485,7 +13204,7 @@
         </p:blipFill>
         <p:spPr>
           <a:xfrm>
-            <a:off x="11109960" y="5394959"/>
+            <a:off x="11109960" y="5715000"/>
             <a:ext cx="384048" cy="384048"/>
           </a:xfrm>
           <a:prstGeom prst="rect">
@@ -12501,7 +13220,7 @@
         </p:nvSpPr>
         <p:spPr>
           <a:xfrm>
-            <a:off x="11612880" y="5458968"/>
+            <a:off x="11612880" y="5779008"/>
             <a:ext cx="2468880" cy="274320"/>
           </a:xfrm>
           <a:prstGeom prst="rect">
@@ -12545,7 +13264,7 @@
         </p:blipFill>
         <p:spPr>
           <a:xfrm>
-            <a:off x="11109960" y="5943600"/>
+            <a:off x="11109960" y="6172200"/>
             <a:ext cx="384048" cy="384048"/>
           </a:xfrm>
           <a:prstGeom prst="rect">
@@ -12561,7 +13280,7 @@
         </p:nvSpPr>
         <p:spPr>
           <a:xfrm>
-            <a:off x="11612880" y="6007608"/>
+            <a:off x="11612880" y="6236208"/>
             <a:ext cx="2468880" cy="274320"/>
           </a:xfrm>
           <a:prstGeom prst="rect">
@@ -12605,7 +13324,7 @@
         </p:blipFill>
         <p:spPr>
           <a:xfrm>
-            <a:off x="11109960" y="6492240"/>
+            <a:off x="11109960" y="6629400"/>
             <a:ext cx="384048" cy="384048"/>
           </a:xfrm>
           <a:prstGeom prst="rect">
@@ -12621,7 +13340,7 @@
         </p:nvSpPr>
         <p:spPr>
           <a:xfrm>
-            <a:off x="11612880" y="6556248"/>
+            <a:off x="11612880" y="6693408"/>
             <a:ext cx="2468880" cy="274320"/>
           </a:xfrm>
           <a:prstGeom prst="rect">
@@ -12665,7 +13384,7 @@
         </p:blipFill>
         <p:spPr>
           <a:xfrm>
-            <a:off x="11109960" y="7040879"/>
+            <a:off x="11109960" y="7086600"/>
             <a:ext cx="384048" cy="384048"/>
           </a:xfrm>
           <a:prstGeom prst="rect">
@@ -12681,7 +13400,7 @@
         </p:nvSpPr>
         <p:spPr>
           <a:xfrm>
-            <a:off x="11612880" y="7104888"/>
+            <a:off x="11612880" y="7150608"/>
             <a:ext cx="2468880" cy="274320"/>
           </a:xfrm>
           <a:prstGeom prst="rect">
@@ -12777,6 +13496,517 @@
                 <a:ea typeface="Noto Sans JP"/>
               </a:rPr>
               <a:t>5 / 5</a:t>
+            </a:r>
+          </a:p>
+        </p:txBody>
+      </p:sp>
+      <p:pic>
+        <p:nvPicPr>
+          <p:cNvPr id="74" name="Picture 73" descr="image.png"/>
+          <p:cNvPicPr>
+            <a:picLocks noChangeAspect="1"/>
+          </p:cNvPicPr>
+          <p:nvPr/>
+        </p:nvPicPr>
+        <p:blipFill>
+          <a:blip r:embed="rId4"/>
+          <a:stretch>
+            <a:fillRect/>
+          </a:stretch>
+        </p:blipFill>
+        <p:spPr>
+          <a:xfrm>
+            <a:off x="5577840" y="3246120"/>
+            <a:ext cx="384048" cy="384048"/>
+          </a:xfrm>
+          <a:prstGeom prst="rect">
+            <a:avLst/>
+          </a:prstGeom>
+        </p:spPr>
+      </p:pic>
+      <p:sp>
+        <p:nvSpPr>
+          <p:cNvPr id="75" name="TextBox 17"/>
+          <p:cNvSpPr txBox="1"/>
+          <p:nvPr/>
+        </p:nvSpPr>
+        <p:spPr>
+          <a:xfrm>
+            <a:off x="6035040" y="3218688"/>
+            <a:ext cx="1874520" cy="457200"/>
+          </a:xfrm>
+          <a:prstGeom prst="rect">
+            <a:avLst/>
+          </a:prstGeom>
+          <a:noFill/>
+        </p:spPr>
+        <p:txBody>
+          <a:bodyPr wrap="square" anchor="t" lIns="27432" rIns="27432" tIns="27432" bIns="27432">
+            <a:spAutoFit/>
+          </a:bodyPr>
+          <a:lstStyle/>
+          <a:p>
+            <a:pPr algn="l"/>
+            <a:r>
+              <a:rPr sz="1000" b="1">
+                <a:solidFill>
+                  <a:srgbClr val="232F3E"/>
+                </a:solidFill>
+                <a:latin typeface="Noto Sans JP"/>
+                <a:ea typeface="Noto Sans JP"/>
+              </a:rPr>
+              <a:t>Kafbat UI</a:t>
+            </a:r>
+          </a:p>
+          <a:p>
+            <a:pPr algn="l"/>
+            <a:r>
+              <a:rPr sz="850" b="0">
+                <a:solidFill>
+                  <a:srgbClr val="5A6775"/>
+                </a:solidFill>
+                <a:latin typeface="Noto Sans JP"/>
+                <a:ea typeface="Noto Sans JP"/>
+              </a:rPr>
+              <a:t>stream（いつも 1 つ）</a:t>
+            </a:r>
+          </a:p>
+        </p:txBody>
+      </p:sp>
+      <p:sp>
+        <p:nvSpPr>
+          <p:cNvPr id="76" name="TextBox 17"/>
+          <p:cNvSpPr txBox="1"/>
+          <p:nvPr/>
+        </p:nvSpPr>
+        <p:spPr>
+          <a:xfrm>
+            <a:off x="3502152" y="5916168"/>
+            <a:ext cx="1188720" cy="457200"/>
+          </a:xfrm>
+          <a:prstGeom prst="rect">
+            <a:avLst/>
+          </a:prstGeom>
+          <a:noFill/>
+        </p:spPr>
+        <p:txBody>
+          <a:bodyPr wrap="square" anchor="t" lIns="27432" rIns="27432" tIns="27432" bIns="27432">
+            <a:spAutoFit/>
+          </a:bodyPr>
+          <a:lstStyle/>
+          <a:p>
+            <a:pPr algn="l"/>
+            <a:r>
+              <a:rPr sz="1000" b="1">
+                <a:solidFill>
+                  <a:srgbClr val="232F3E"/>
+                </a:solidFill>
+                <a:latin typeface="Noto Sans JP"/>
+                <a:ea typeface="Noto Sans JP"/>
+              </a:rPr>
+              <a:t>MSK</a:t>
+            </a:r>
+          </a:p>
+          <a:p>
+            <a:pPr algn="l"/>
+            <a:r>
+              <a:rPr sz="850" b="0">
+                <a:solidFill>
+                  <a:srgbClr val="5A6775"/>
+                </a:solidFill>
+                <a:latin typeface="Noto Sans JP"/>
+                <a:ea typeface="Noto Sans JP"/>
+              </a:rPr>
+              <a:t>2〜3 AZ（既定 2）</a:t>
+            </a:r>
+          </a:p>
+        </p:txBody>
+      </p:sp>
+      <p:sp>
+        <p:nvSpPr>
+          <p:cNvPr id="77" name="TextBox 17"/>
+          <p:cNvSpPr txBox="1"/>
+          <p:nvPr/>
+        </p:nvSpPr>
+        <p:spPr>
+          <a:xfrm>
+            <a:off x="5102352" y="5916168"/>
+            <a:ext cx="1188720" cy="457200"/>
+          </a:xfrm>
+          <a:prstGeom prst="rect">
+            <a:avLst/>
+          </a:prstGeom>
+          <a:noFill/>
+        </p:spPr>
+        <p:txBody>
+          <a:bodyPr wrap="square" anchor="t" lIns="27432" rIns="27432" tIns="27432" bIns="27432">
+            <a:spAutoFit/>
+          </a:bodyPr>
+          <a:lstStyle/>
+          <a:p>
+            <a:pPr algn="l"/>
+            <a:r>
+              <a:rPr sz="1000" b="1">
+                <a:solidFill>
+                  <a:srgbClr val="232F3E"/>
+                </a:solidFill>
+                <a:latin typeface="Noto Sans JP"/>
+                <a:ea typeface="Noto Sans JP"/>
+              </a:rPr>
+              <a:t>RDS</a:t>
+            </a:r>
+          </a:p>
+          <a:p>
+            <a:pPr algn="l"/>
+            <a:r>
+              <a:rPr sz="850" b="0">
+                <a:solidFill>
+                  <a:srgbClr val="5A6775"/>
+                </a:solidFill>
+                <a:latin typeface="Noto Sans JP"/>
+                <a:ea typeface="Noto Sans JP"/>
+              </a:rPr>
+              <a:t>1〜2 AZ</a:t>
+            </a:r>
+          </a:p>
+        </p:txBody>
+      </p:sp>
+      <p:sp>
+        <p:nvSpPr>
+          <p:cNvPr id="78" name="TextBox 17"/>
+          <p:cNvSpPr txBox="1"/>
+          <p:nvPr/>
+        </p:nvSpPr>
+        <p:spPr>
+          <a:xfrm>
+            <a:off x="6702552" y="5916168"/>
+            <a:ext cx="1188720" cy="457200"/>
+          </a:xfrm>
+          <a:prstGeom prst="rect">
+            <a:avLst/>
+          </a:prstGeom>
+          <a:noFill/>
+        </p:spPr>
+        <p:txBody>
+          <a:bodyPr wrap="square" anchor="t" lIns="27432" rIns="27432" tIns="27432" bIns="27432">
+            <a:spAutoFit/>
+          </a:bodyPr>
+          <a:lstStyle/>
+          <a:p>
+            <a:pPr algn="l"/>
+            <a:r>
+              <a:rPr sz="1000" b="1">
+                <a:solidFill>
+                  <a:srgbClr val="232F3E"/>
+                </a:solidFill>
+                <a:latin typeface="Noto Sans JP"/>
+                <a:ea typeface="Noto Sans JP"/>
+              </a:rPr>
+              <a:t>EMR Serverless</a:t>
+            </a:r>
+          </a:p>
+          <a:p>
+            <a:pPr algn="l"/>
+            <a:r>
+              <a:rPr sz="850" b="0">
+                <a:solidFill>
+                  <a:srgbClr val="5A6775"/>
+                </a:solidFill>
+                <a:latin typeface="Noto Sans JP"/>
+                <a:ea typeface="Noto Sans JP"/>
+              </a:rPr>
+              <a:t>1〜3 AZ</a:t>
+            </a:r>
+          </a:p>
+        </p:txBody>
+      </p:sp>
+      <p:sp>
+        <p:nvSpPr>
+          <p:cNvPr id="79" name="TextBox 17"/>
+          <p:cNvSpPr txBox="1"/>
+          <p:nvPr/>
+        </p:nvSpPr>
+        <p:spPr>
+          <a:xfrm>
+            <a:off x="3502152" y="6647688"/>
+            <a:ext cx="1188720" cy="457200"/>
+          </a:xfrm>
+          <a:prstGeom prst="rect">
+            <a:avLst/>
+          </a:prstGeom>
+          <a:noFill/>
+        </p:spPr>
+        <p:txBody>
+          <a:bodyPr wrap="square" anchor="t" lIns="27432" rIns="27432" tIns="27432" bIns="27432">
+            <a:spAutoFit/>
+          </a:bodyPr>
+          <a:lstStyle/>
+          <a:p>
+            <a:pPr algn="l"/>
+            <a:r>
+              <a:rPr sz="1000" b="1">
+                <a:solidFill>
+                  <a:srgbClr val="232F3E"/>
+                </a:solidFill>
+                <a:latin typeface="Noto Sans JP"/>
+                <a:ea typeface="Noto Sans JP"/>
+              </a:rPr>
+              <a:t>Lambda</a:t>
+            </a:r>
+          </a:p>
+          <a:p>
+            <a:pPr algn="l"/>
+            <a:r>
+              <a:rPr sz="850" b="0">
+                <a:solidFill>
+                  <a:srgbClr val="5A6775"/>
+                </a:solidFill>
+                <a:latin typeface="Noto Sans JP"/>
+                <a:ea typeface="Noto Sans JP"/>
+              </a:rPr>
+              <a:t>1〜3 AZ</a:t>
+            </a:r>
+          </a:p>
+        </p:txBody>
+      </p:sp>
+      <p:sp>
+        <p:nvSpPr>
+          <p:cNvPr id="80" name="TextBox 17"/>
+          <p:cNvSpPr txBox="1"/>
+          <p:nvPr/>
+        </p:nvSpPr>
+        <p:spPr>
+          <a:xfrm>
+            <a:off x="5102352" y="6647688"/>
+            <a:ext cx="1188720" cy="457200"/>
+          </a:xfrm>
+          <a:prstGeom prst="rect">
+            <a:avLst/>
+          </a:prstGeom>
+          <a:noFill/>
+        </p:spPr>
+        <p:txBody>
+          <a:bodyPr wrap="square" anchor="t" lIns="27432" rIns="27432" tIns="27432" bIns="27432">
+            <a:spAutoFit/>
+          </a:bodyPr>
+          <a:lstStyle/>
+          <a:p>
+            <a:pPr algn="l"/>
+            <a:r>
+              <a:rPr sz="1000" b="1">
+                <a:solidFill>
+                  <a:srgbClr val="232F3E"/>
+                </a:solidFill>
+                <a:latin typeface="Noto Sans JP"/>
+                <a:ea typeface="Noto Sans JP"/>
+              </a:rPr>
+              <a:t>内部 NLB</a:t>
+            </a:r>
+          </a:p>
+          <a:p>
+            <a:pPr algn="l"/>
+            <a:r>
+              <a:rPr sz="850" b="0">
+                <a:solidFill>
+                  <a:srgbClr val="5A6775"/>
+                </a:solidFill>
+                <a:latin typeface="Noto Sans JP"/>
+                <a:ea typeface="Noto Sans JP"/>
+              </a:rPr>
+              <a:t>1〜3 AZ</a:t>
+            </a:r>
+          </a:p>
+        </p:txBody>
+      </p:sp>
+      <p:pic>
+        <p:nvPicPr>
+          <p:cNvPr id="33" name="Picture 32" descr="3e5bdaec.png"/>
+          <p:cNvPicPr>
+            <a:picLocks noChangeAspect="1"/>
+          </p:cNvPicPr>
+          <p:nvPr/>
+        </p:nvPicPr>
+        <p:blipFill>
+          <a:blip r:embed="rId6"/>
+          <a:stretch>
+            <a:fillRect/>
+          </a:stretch>
+        </p:blipFill>
+        <p:spPr>
+          <a:xfrm>
+            <a:off x="11109960" y="3429000"/>
+            <a:ext cx="384048" cy="384048"/>
+          </a:xfrm>
+          <a:prstGeom prst="rect">
+            <a:avLst/>
+          </a:prstGeom>
+        </p:spPr>
+      </p:pic>
+      <p:sp>
+        <p:nvSpPr>
+          <p:cNvPr id="34" name="TextBox 33"/>
+          <p:cNvSpPr txBox="1"/>
+          <p:nvPr/>
+        </p:nvSpPr>
+        <p:spPr>
+          <a:xfrm>
+            <a:off x="11612880" y="3493008"/>
+            <a:ext cx="2468880" cy="274320"/>
+          </a:xfrm>
+          <a:prstGeom prst="rect">
+            <a:avLst/>
+          </a:prstGeom>
+          <a:noFill/>
+        </p:spPr>
+        <p:txBody>
+          <a:bodyPr wrap="square" anchor="t" lIns="27432" rIns="27432" tIns="27432" bIns="27432">
+            <a:spAutoFit/>
+          </a:bodyPr>
+          <a:lstStyle/>
+          <a:p>
+            <a:pPr algn="l"/>
+            <a:r>
+              <a:rPr sz="1000" b="1">
+                <a:solidFill>
+                  <a:srgbClr val="232F3E"/>
+                </a:solidFill>
+                <a:latin typeface="Noto Sans JP"/>
+                <a:ea typeface="Noto Sans JP"/>
+              </a:rPr>
+              <a:t>Neptune Analytics（1〜3 AZ）</a:t>
+            </a:r>
+          </a:p>
+        </p:txBody>
+      </p:sp>
+      <p:sp>
+        <p:nvSpPr>
+          <p:cNvPr id="81" name="Rounded Rectangle 58"/>
+          <p:cNvSpPr/>
+          <p:nvPr/>
+        </p:nvSpPr>
+        <p:spPr>
+          <a:xfrm>
+            <a:off x="11109960" y="5257800"/>
+            <a:ext cx="384048" cy="384048"/>
+          </a:xfrm>
+          <a:prstGeom prst="roundRect">
+            <a:avLst>
+              <a:gd name="adj" fmla="val 12000"/>
+            </a:avLst>
+          </a:prstGeom>
+          <a:solidFill>
+            <a:srgbClr val="8C4FFF"/>
+          </a:solidFill>
+          <a:ln w="12700">
+            <a:solidFill>
+              <a:srgbClr val="8C4FFF"/>
+            </a:solidFill>
+          </a:ln>
+          <a:effectLst/>
+        </p:spPr>
+        <p:style>
+          <a:lnRef idx="1">
+            <a:schemeClr val="accent1"/>
+          </a:lnRef>
+          <a:fillRef idx="3">
+            <a:schemeClr val="accent1"/>
+          </a:fillRef>
+          <a:effectRef idx="2">
+            <a:schemeClr val="accent1"/>
+          </a:effectRef>
+          <a:fontRef idx="minor">
+            <a:schemeClr val="lt1"/>
+          </a:fontRef>
+        </p:style>
+        <p:txBody>
+          <a:bodyPr rtlCol="0" anchor="ctr"/>
+          <a:lstStyle/>
+          <a:p>
+            <a:pPr algn="ctr"/>
+          </a:p>
+        </p:txBody>
+      </p:sp>
+      <p:sp>
+        <p:nvSpPr>
+          <p:cNvPr id="82" name="TextBox 59"/>
+          <p:cNvSpPr txBox="1"/>
+          <p:nvPr/>
+        </p:nvSpPr>
+        <p:spPr>
+          <a:xfrm>
+            <a:off x="11064240" y="5257800"/>
+            <a:ext cx="475488" cy="384048"/>
+          </a:xfrm>
+          <a:prstGeom prst="rect">
+            <a:avLst/>
+          </a:prstGeom>
+          <a:noFill/>
+        </p:spPr>
+        <p:txBody>
+          <a:bodyPr wrap="square" anchor="ctr" lIns="27432" rIns="27432" tIns="27432" bIns="27432">
+            <a:spAutoFit/>
+          </a:bodyPr>
+          <a:lstStyle/>
+          <a:p>
+            <a:pPr algn="ctr"/>
+            <a:r>
+              <a:rPr sz="550" b="1">
+                <a:solidFill>
+                  <a:srgbClr val="FFFFFF"/>
+                </a:solidFill>
+                <a:latin typeface="Noto Sans JP"/>
+                <a:ea typeface="Noto Sans JP"/>
+              </a:rPr>
+              <a:t>Fire</a:t>
+            </a:r>
+          </a:p>
+          <a:p>
+            <a:pPr algn="ctr"/>
+            <a:r>
+              <a:rPr sz="550" b="1">
+                <a:solidFill>
+                  <a:srgbClr val="FFFFFF"/>
+                </a:solidFill>
+                <a:latin typeface="Noto Sans JP"/>
+                <a:ea typeface="Noto Sans JP"/>
+              </a:rPr>
+              <a:t>hose</a:t>
+            </a:r>
+          </a:p>
+        </p:txBody>
+      </p:sp>
+      <p:sp>
+        <p:nvSpPr>
+          <p:cNvPr id="83" name="TextBox 60"/>
+          <p:cNvSpPr txBox="1"/>
+          <p:nvPr/>
+        </p:nvSpPr>
+        <p:spPr>
+          <a:xfrm>
+            <a:off x="11612880" y="5321808"/>
+            <a:ext cx="2468880" cy="274320"/>
+          </a:xfrm>
+          <a:prstGeom prst="rect">
+            <a:avLst/>
+          </a:prstGeom>
+          <a:noFill/>
+        </p:spPr>
+        <p:txBody>
+          <a:bodyPr wrap="square" anchor="t" lIns="27432" rIns="27432" tIns="27432" bIns="27432">
+            <a:spAutoFit/>
+          </a:bodyPr>
+          <a:lstStyle/>
+          <a:p>
+            <a:pPr algn="l"/>
+            <a:r>
+              <a:rPr sz="1000" b="1">
+                <a:solidFill>
+                  <a:srgbClr val="232F3E"/>
+                </a:solidFill>
+                <a:latin typeface="Noto Sans JP"/>
+                <a:ea typeface="Noto Sans JP"/>
+              </a:rPr>
+              <a:t>Data Firehose</a:t>
             </a:r>
           </a:p>
         </p:txBody>

--- a/docs/architecture.pptx
+++ b/docs/architecture.pptx
@@ -3123,7 +3123,7 @@
                 <a:latin typeface="Noto Sans JP"/>
                 <a:ea typeface="Noto Sans JP"/>
               </a:rPr>
-              <a:t>netops-biz 全体像</a:t>
+              <a:t>nwc-poc 全体像</a:t>
             </a:r>
           </a:p>
         </p:txBody>
